--- a/4_Reports/Study_Method.pptx
+++ b/4_Reports/Study_Method.pptx
@@ -7,12 +7,15 @@
   <p:sldIdLst>
     <p:sldId id="256" r:id="rId3"/>
     <p:sldId id="258" r:id="rId4"/>
-    <p:sldId id="259" r:id="rId5"/>
-    <p:sldId id="260" r:id="rId6"/>
-    <p:sldId id="261" r:id="rId7"/>
-    <p:sldId id="262" r:id="rId8"/>
-    <p:sldId id="263" r:id="rId9"/>
-    <p:sldId id="257" r:id="rId10"/>
+    <p:sldId id="257" r:id="rId5"/>
+    <p:sldId id="267" r:id="rId6"/>
+    <p:sldId id="259" r:id="rId7"/>
+    <p:sldId id="268" r:id="rId8"/>
+    <p:sldId id="260" r:id="rId9"/>
+    <p:sldId id="261" r:id="rId10"/>
+    <p:sldId id="262" r:id="rId11"/>
+    <p:sldId id="265" r:id="rId12"/>
+    <p:sldId id="263" r:id="rId13"/>
   </p:sldIdLst>
   <p:sldSz cx="12192000" cy="6858000"/>
   <p:notesSz cx="6858000" cy="9144000"/>
@@ -2946,7 +2949,7 @@
         <p:spPr>
           <a:xfrm>
             <a:off x="525780" y="429260"/>
-            <a:ext cx="11115040" cy="2861310"/>
+            <a:ext cx="11115040" cy="3138170"/>
           </a:xfrm>
           <a:prstGeom prst="rect">
             <a:avLst/>
@@ -2970,7 +2973,19 @@
           <a:p>
             <a:r>
               <a:rPr lang="zh-CN" altLang="en-US"/>
-              <a:t>一、生成模型的检验【</a:t>
+              <a:t>一、</a:t>
+            </a:r>
+            <a:r>
+              <a:rPr lang="zh-CN" altLang="en-US">
+                <a:highlight>
+                  <a:srgbClr val="FFFF00"/>
+                </a:highlight>
+              </a:rPr>
+              <a:t>生成模型的检验</a:t>
+            </a:r>
+            <a:r>
+              <a:rPr lang="zh-CN" altLang="en-US"/>
+              <a:t>【</a:t>
             </a:r>
             <a:r>
               <a:rPr lang="en-US" altLang="zh-CN"/>
@@ -3029,6 +3044,29 @@
             <a:endParaRPr lang="zh-CN" altLang="en-US"/>
           </a:p>
           <a:p>
+            <a:r>
+              <a:rPr lang="en-US" altLang="zh-CN"/>
+              <a:t>3.</a:t>
+            </a:r>
+            <a:r>
+              <a:rPr lang="zh-CN" altLang="en-US"/>
+              <a:t>不同生成模型之间的比较（不同模型之间哪一种</a:t>
+            </a:r>
+            <a:r>
+              <a:rPr lang="zh-CN" altLang="en-US">
+                <a:solidFill>
+                  <a:srgbClr val="FF0000"/>
+                </a:solidFill>
+              </a:rPr>
+              <a:t>更具有</a:t>
+            </a:r>
+            <a:r>
+              <a:rPr lang="zh-CN" altLang="en-US"/>
+              <a:t>实际预测效用）【生成模型与生成模型之间的比较】</a:t>
+            </a:r>
+            <a:endParaRPr lang="zh-CN" altLang="en-US"/>
+          </a:p>
+          <a:p>
             <a:endParaRPr lang="zh-CN" altLang="en-US"/>
           </a:p>
           <a:p>
@@ -3065,6 +3103,18 @@
             <a:r>
               <a:rPr lang="zh-CN" altLang="en-US"/>
               <a:t>探索交互作用</a:t>
+            </a:r>
+            <a:r>
+              <a:rPr lang="en-US" altLang="zh-CN"/>
+              <a:t>{</a:t>
+            </a:r>
+            <a:r>
+              <a:rPr lang="zh-CN" altLang="en-US"/>
+              <a:t>可能是选做</a:t>
+            </a:r>
+            <a:r>
+              <a:rPr lang="en-US" altLang="zh-CN"/>
+              <a:t>}</a:t>
             </a:r>
             <a:endParaRPr lang="zh-CN" altLang="en-US"/>
           </a:p>
@@ -3097,6 +3147,614 @@
           </a:p>
         </p:txBody>
       </p:sp>
+      <p:sp>
+        <p:nvSpPr>
+          <p:cNvPr id="2" name="文本框 1"/>
+          <p:cNvSpPr txBox="1"/>
+          <p:nvPr/>
+        </p:nvSpPr>
+        <p:spPr>
+          <a:xfrm>
+            <a:off x="154940" y="4227830"/>
+            <a:ext cx="4064000" cy="368300"/>
+          </a:xfrm>
+          <a:prstGeom prst="rect">
+            <a:avLst/>
+          </a:prstGeom>
+          <a:noFill/>
+        </p:spPr>
+        <p:txBody>
+          <a:bodyPr wrap="square" rtlCol="0">
+            <a:spAutoFit/>
+          </a:bodyPr>
+          <a:p>
+            <a:r>
+              <a:rPr lang="zh-CN" altLang="en-US"/>
+              <a:t>模型层面：</a:t>
+            </a:r>
+            <a:endParaRPr lang="zh-CN" altLang="en-US"/>
+          </a:p>
+        </p:txBody>
+      </p:sp>
+      <p:sp>
+        <p:nvSpPr>
+          <p:cNvPr id="3" name="文本框 2"/>
+          <p:cNvSpPr txBox="1"/>
+          <p:nvPr/>
+        </p:nvSpPr>
+        <p:spPr>
+          <a:xfrm>
+            <a:off x="525780" y="4787265"/>
+            <a:ext cx="8637270" cy="2030095"/>
+          </a:xfrm>
+          <a:prstGeom prst="rect">
+            <a:avLst/>
+          </a:prstGeom>
+          <a:noFill/>
+        </p:spPr>
+        <p:txBody>
+          <a:bodyPr wrap="square" rtlCol="0">
+            <a:spAutoFit/>
+          </a:bodyPr>
+          <a:p>
+            <a:r>
+              <a:rPr lang="zh-CN" altLang="en-US">
+                <a:sym typeface="+mn-ea"/>
+              </a:rPr>
+              <a:t>（一）基线生成模型：</a:t>
+            </a:r>
+            <a:r>
+              <a:rPr lang="en-US" altLang="zh-CN">
+                <a:sym typeface="+mn-ea"/>
+              </a:rPr>
+              <a:t>Sigmoid </a:t>
+            </a:r>
+            <a:r>
+              <a:rPr lang="zh-CN" altLang="en-US">
+                <a:sym typeface="+mn-ea"/>
+              </a:rPr>
+              <a:t>函数</a:t>
+            </a:r>
+            <a:r>
+              <a:rPr lang="en-US" altLang="zh-CN">
+                <a:sym typeface="+mn-ea"/>
+              </a:rPr>
+              <a:t> + </a:t>
+            </a:r>
+            <a:r>
+              <a:rPr lang="zh-CN" altLang="en-US">
+                <a:sym typeface="+mn-ea"/>
+              </a:rPr>
+              <a:t>标准</a:t>
+            </a:r>
+            <a:r>
+              <a:rPr lang="en-US" altLang="zh-CN">
+                <a:sym typeface="+mn-ea"/>
+              </a:rPr>
+              <a:t> DDM</a:t>
+            </a:r>
+            <a:endParaRPr lang="zh-CN" altLang="en-US"/>
+          </a:p>
+          <a:p>
+            <a:r>
+              <a:rPr lang="zh-CN" altLang="en-US">
+                <a:sym typeface="+mn-ea"/>
+              </a:rPr>
+              <a:t>（二）进阶生成模型：</a:t>
+            </a:r>
+            <a:r>
+              <a:rPr lang="en-US" altLang="zh-CN">
+                <a:sym typeface="+mn-ea"/>
+              </a:rPr>
+              <a:t>Sigmoid + Gaussian Process</a:t>
+            </a:r>
+            <a:r>
+              <a:rPr lang="zh-CN" altLang="en-US">
+                <a:sym typeface="+mn-ea"/>
+              </a:rPr>
+              <a:t>（</a:t>
+            </a:r>
+            <a:r>
+              <a:rPr lang="en-US" altLang="zh-CN">
+                <a:sym typeface="+mn-ea"/>
+              </a:rPr>
+              <a:t>GP</a:t>
+            </a:r>
+            <a:r>
+              <a:rPr lang="zh-CN" altLang="en-US">
+                <a:sym typeface="+mn-ea"/>
+              </a:rPr>
+              <a:t>）</a:t>
+            </a:r>
+            <a:endParaRPr lang="zh-CN" altLang="en-US"/>
+          </a:p>
+          <a:p>
+            <a:pPr indent="457200"/>
+            <a:r>
+              <a:rPr lang="zh-CN" altLang="en-US">
+                <a:sym typeface="+mn-ea"/>
+              </a:rPr>
+              <a:t>模型包含两种建模形式：</a:t>
+            </a:r>
+            <a:endParaRPr lang="zh-CN" altLang="en-US"/>
+          </a:p>
+          <a:p>
+            <a:pPr indent="457200"/>
+            <a:r>
+              <a:rPr lang="zh-CN" altLang="en-US">
+                <a:sym typeface="+mn-ea"/>
+              </a:rPr>
+              <a:t>①以</a:t>
+            </a:r>
+            <a:r>
+              <a:rPr lang="en-US" altLang="zh-CN">
+                <a:sym typeface="+mn-ea"/>
+              </a:rPr>
+              <a:t> Sigmoid </a:t>
+            </a:r>
+            <a:r>
+              <a:rPr lang="zh-CN" altLang="en-US">
+                <a:sym typeface="+mn-ea"/>
+              </a:rPr>
+              <a:t>函数为先验，由</a:t>
+            </a:r>
+            <a:r>
+              <a:rPr lang="en-US" altLang="zh-CN">
+                <a:sym typeface="+mn-ea"/>
+              </a:rPr>
+              <a:t> GP </a:t>
+            </a:r>
+            <a:r>
+              <a:rPr lang="zh-CN" altLang="en-US">
+                <a:sym typeface="+mn-ea"/>
+              </a:rPr>
+              <a:t>学习并替代其非线性映射关系；</a:t>
+            </a:r>
+            <a:endParaRPr lang="zh-CN" altLang="en-US"/>
+          </a:p>
+          <a:p>
+            <a:pPr indent="457200"/>
+            <a:r>
+              <a:rPr lang="zh-CN" altLang="en-US">
+                <a:sym typeface="+mn-ea"/>
+              </a:rPr>
+              <a:t>②以</a:t>
+            </a:r>
+            <a:r>
+              <a:rPr lang="en-US" altLang="zh-CN">
+                <a:sym typeface="+mn-ea"/>
+              </a:rPr>
+              <a:t> Sigmoid </a:t>
+            </a:r>
+            <a:r>
+              <a:rPr lang="zh-CN" altLang="en-US">
+                <a:sym typeface="+mn-ea"/>
+              </a:rPr>
+              <a:t>函数主导核心关联，由</a:t>
+            </a:r>
+            <a:r>
+              <a:rPr lang="en-US" altLang="zh-CN">
+                <a:sym typeface="+mn-ea"/>
+              </a:rPr>
+              <a:t> GP </a:t>
+            </a:r>
+            <a:r>
+              <a:rPr lang="zh-CN" altLang="en-US">
+                <a:sym typeface="+mn-ea"/>
+              </a:rPr>
+              <a:t>捕捉模型残差与个体差异。</a:t>
+            </a:r>
+            <a:endParaRPr lang="zh-CN" altLang="en-US"/>
+          </a:p>
+          <a:p>
+            <a:r>
+              <a:rPr lang="zh-CN" altLang="en-US">
+                <a:sym typeface="+mn-ea"/>
+              </a:rPr>
+              <a:t>（三）情境化生成模型：基于</a:t>
+            </a:r>
+            <a:r>
+              <a:rPr lang="en-US" altLang="zh-CN">
+                <a:sym typeface="+mn-ea"/>
+              </a:rPr>
+              <a:t> HDDM </a:t>
+            </a:r>
+            <a:r>
+              <a:rPr lang="zh-CN" altLang="en-US">
+                <a:sym typeface="+mn-ea"/>
+              </a:rPr>
+              <a:t>的条件化参数建模</a:t>
+            </a:r>
+            <a:endParaRPr lang="zh-CN" altLang="en-US"/>
+          </a:p>
+          <a:p>
+            <a:pPr indent="457200"/>
+            <a:endParaRPr lang="en-US" altLang="zh-CN"/>
+          </a:p>
+        </p:txBody>
+      </p:sp>
+    </p:spTree>
+  </p:cSld>
+  <p:clrMapOvr>
+    <a:masterClrMapping/>
+  </p:clrMapOvr>
+</p:sld>
+</file>
+
+<file path=ppt/slides/slide10.xml><?xml version="1.0" encoding="utf-8"?>
+<p:sld xmlns:a="http://schemas.openxmlformats.org/drawingml/2006/main" xmlns:r="http://schemas.openxmlformats.org/officeDocument/2006/relationships" xmlns:p="http://schemas.openxmlformats.org/presentationml/2006/main">
+  <p:cSld>
+    <p:spTree>
+      <p:nvGrpSpPr>
+        <p:cNvPr id="1" name=""/>
+        <p:cNvGrpSpPr/>
+        <p:nvPr/>
+      </p:nvGrpSpPr>
+      <p:grpSpPr/>
+      <p:sp>
+        <p:nvSpPr>
+          <p:cNvPr id="5" name="文本框 4"/>
+          <p:cNvSpPr txBox="1"/>
+          <p:nvPr/>
+        </p:nvSpPr>
+        <p:spPr>
+          <a:xfrm>
+            <a:off x="525780" y="429260"/>
+            <a:ext cx="11115040" cy="5984240"/>
+          </a:xfrm>
+          <a:prstGeom prst="rect">
+            <a:avLst/>
+          </a:prstGeom>
+          <a:noFill/>
+        </p:spPr>
+        <p:txBody>
+          <a:bodyPr wrap="square" rtlCol="0">
+            <a:noAutofit/>
+          </a:bodyPr>
+          <a:p>
+            <a:r>
+              <a:rPr lang="zh-CN" altLang="en-US"/>
+              <a:t>研究具体方法【思路篇】</a:t>
+            </a:r>
+            <a:endParaRPr lang="zh-CN" altLang="en-US"/>
+          </a:p>
+          <a:p>
+            <a:pPr algn="ctr"/>
+            <a:r>
+              <a:rPr lang="zh-CN" altLang="en-US">
+                <a:highlight>
+                  <a:srgbClr val="FFFF00"/>
+                </a:highlight>
+                <a:sym typeface="+mn-ea"/>
+              </a:rPr>
+              <a:t>实验设计空间</a:t>
+            </a:r>
+            <a:r>
+              <a:rPr lang="en-US" altLang="zh-CN">
+                <a:highlight>
+                  <a:srgbClr val="FFFF00"/>
+                </a:highlight>
+                <a:sym typeface="+mn-ea"/>
+              </a:rPr>
+              <a:t> Ω </a:t>
+            </a:r>
+            <a:r>
+              <a:rPr lang="en-US" altLang="en-US">
+                <a:highlight>
+                  <a:srgbClr val="FFFF00"/>
+                </a:highlight>
+                <a:sym typeface="+mn-ea"/>
+              </a:rPr>
+              <a:t>→</a:t>
+            </a:r>
+            <a:r>
+              <a:rPr lang="en-US" altLang="zh-CN">
+                <a:highlight>
+                  <a:srgbClr val="FFFF00"/>
+                </a:highlight>
+                <a:sym typeface="+mn-ea"/>
+              </a:rPr>
+              <a:t> </a:t>
+            </a:r>
+            <a:r>
+              <a:rPr lang="zh-CN" altLang="en-US">
+                <a:highlight>
+                  <a:srgbClr val="FFFF00"/>
+                </a:highlight>
+                <a:sym typeface="+mn-ea"/>
+              </a:rPr>
+              <a:t>潜在心理参数（</a:t>
+            </a:r>
+            <a:r>
+              <a:rPr lang="en-US" altLang="zh-CN">
+                <a:highlight>
+                  <a:srgbClr val="FFFF00"/>
+                </a:highlight>
+                <a:sym typeface="+mn-ea"/>
+              </a:rPr>
+              <a:t>DDM</a:t>
+            </a:r>
+            <a:r>
+              <a:rPr lang="zh-CN" altLang="en-US">
+                <a:highlight>
+                  <a:srgbClr val="FFFF00"/>
+                </a:highlight>
+                <a:sym typeface="+mn-ea"/>
+              </a:rPr>
+              <a:t>）</a:t>
+            </a:r>
+            <a:r>
+              <a:rPr lang="en-US" altLang="zh-CN">
+                <a:highlight>
+                  <a:srgbClr val="FFFF00"/>
+                </a:highlight>
+                <a:sym typeface="+mn-ea"/>
+              </a:rPr>
+              <a:t> </a:t>
+            </a:r>
+            <a:r>
+              <a:rPr lang="en-US" altLang="en-US">
+                <a:highlight>
+                  <a:srgbClr val="FFFF00"/>
+                </a:highlight>
+                <a:sym typeface="+mn-ea"/>
+              </a:rPr>
+              <a:t>→</a:t>
+            </a:r>
+            <a:r>
+              <a:rPr lang="en-US" altLang="zh-CN">
+                <a:highlight>
+                  <a:srgbClr val="FFFF00"/>
+                </a:highlight>
+                <a:sym typeface="+mn-ea"/>
+              </a:rPr>
+              <a:t> </a:t>
+            </a:r>
+            <a:r>
+              <a:rPr lang="zh-CN" altLang="en-US">
+                <a:highlight>
+                  <a:srgbClr val="FFFF00"/>
+                </a:highlight>
+                <a:sym typeface="+mn-ea"/>
+              </a:rPr>
+              <a:t>行为数据（</a:t>
+            </a:r>
+            <a:r>
+              <a:rPr lang="en-US" altLang="zh-CN">
+                <a:highlight>
+                  <a:srgbClr val="FFFF00"/>
+                </a:highlight>
+                <a:sym typeface="+mn-ea"/>
+              </a:rPr>
+              <a:t>RT, ACC</a:t>
+            </a:r>
+            <a:r>
+              <a:rPr lang="zh-CN" altLang="en-US">
+                <a:highlight>
+                  <a:srgbClr val="FFFF00"/>
+                </a:highlight>
+                <a:sym typeface="+mn-ea"/>
+              </a:rPr>
+              <a:t>）</a:t>
+            </a:r>
+            <a:endParaRPr lang="zh-CN" altLang="en-US"/>
+          </a:p>
+          <a:p>
+            <a:r>
+              <a:rPr lang="zh-CN" altLang="en-US"/>
+              <a:t>一、生成模型的检验【</a:t>
+            </a:r>
+            <a:r>
+              <a:rPr lang="en-US" altLang="zh-CN"/>
+              <a:t>model checking</a:t>
+            </a:r>
+            <a:r>
+              <a:rPr lang="zh-CN" altLang="en-US"/>
+              <a:t>】</a:t>
+            </a:r>
+            <a:r>
+              <a:rPr lang="en-US" altLang="zh-CN"/>
+              <a:t>  </a:t>
+            </a:r>
+            <a:r>
+              <a:rPr lang="zh-CN" altLang="en-US">
+                <a:gradFill>
+                  <a:gsLst>
+                    <a:gs pos="50000">
+                      <a:schemeClr val="accent2"/>
+                    </a:gs>
+                    <a:gs pos="0">
+                      <a:schemeClr val="accent2">
+                        <a:lumMod val="25000"/>
+                        <a:lumOff val="75000"/>
+                      </a:schemeClr>
+                    </a:gs>
+                    <a:gs pos="100000">
+                      <a:schemeClr val="accent2">
+                        <a:lumMod val="85000"/>
+                      </a:schemeClr>
+                    </a:gs>
+                  </a:gsLst>
+                  <a:lin ang="5400000" scaled="1"/>
+                </a:gradFill>
+                <a:sym typeface="+mn-ea"/>
+              </a:rPr>
+              <a:t>模型在多层级、多统计量、多不确定性条件下，是否能生成</a:t>
+            </a:r>
+            <a:r>
+              <a:rPr lang="en-US" altLang="zh-CN">
+                <a:gradFill>
+                  <a:gsLst>
+                    <a:gs pos="50000">
+                      <a:schemeClr val="accent2"/>
+                    </a:gs>
+                    <a:gs pos="0">
+                      <a:schemeClr val="accent2">
+                        <a:lumMod val="25000"/>
+                        <a:lumOff val="75000"/>
+                      </a:schemeClr>
+                    </a:gs>
+                    <a:gs pos="100000">
+                      <a:schemeClr val="accent2">
+                        <a:lumMod val="85000"/>
+                      </a:schemeClr>
+                    </a:gs>
+                  </a:gsLst>
+                  <a:lin ang="5400000" scaled="1"/>
+                </a:gradFill>
+                <a:sym typeface="+mn-ea"/>
+              </a:rPr>
+              <a:t>“</a:t>
+            </a:r>
+            <a:r>
+              <a:rPr lang="zh-CN" altLang="en-US">
+                <a:gradFill>
+                  <a:gsLst>
+                    <a:gs pos="50000">
+                      <a:schemeClr val="accent2"/>
+                    </a:gs>
+                    <a:gs pos="0">
+                      <a:schemeClr val="accent2">
+                        <a:lumMod val="25000"/>
+                        <a:lumOff val="75000"/>
+                      </a:schemeClr>
+                    </a:gs>
+                    <a:gs pos="100000">
+                      <a:schemeClr val="accent2">
+                        <a:lumMod val="85000"/>
+                      </a:schemeClr>
+                    </a:gs>
+                  </a:gsLst>
+                  <a:lin ang="5400000" scaled="1"/>
+                </a:gradFill>
+                <a:sym typeface="+mn-ea"/>
+              </a:rPr>
+              <a:t>看起来像人类</a:t>
+            </a:r>
+            <a:r>
+              <a:rPr lang="en-US" altLang="zh-CN">
+                <a:gradFill>
+                  <a:gsLst>
+                    <a:gs pos="50000">
+                      <a:schemeClr val="accent2"/>
+                    </a:gs>
+                    <a:gs pos="0">
+                      <a:schemeClr val="accent2">
+                        <a:lumMod val="25000"/>
+                        <a:lumOff val="75000"/>
+                      </a:schemeClr>
+                    </a:gs>
+                    <a:gs pos="100000">
+                      <a:schemeClr val="accent2">
+                        <a:lumMod val="85000"/>
+                      </a:schemeClr>
+                    </a:gs>
+                  </a:gsLst>
+                  <a:lin ang="5400000" scaled="1"/>
+                </a:gradFill>
+                <a:sym typeface="+mn-ea"/>
+              </a:rPr>
+              <a:t>”</a:t>
+            </a:r>
+            <a:r>
+              <a:rPr lang="zh-CN" altLang="en-US">
+                <a:gradFill>
+                  <a:gsLst>
+                    <a:gs pos="50000">
+                      <a:schemeClr val="accent2"/>
+                    </a:gs>
+                    <a:gs pos="0">
+                      <a:schemeClr val="accent2">
+                        <a:lumMod val="25000"/>
+                        <a:lumOff val="75000"/>
+                      </a:schemeClr>
+                    </a:gs>
+                    <a:gs pos="100000">
+                      <a:schemeClr val="accent2">
+                        <a:lumMod val="85000"/>
+                      </a:schemeClr>
+                    </a:gs>
+                  </a:gsLst>
+                  <a:lin ang="5400000" scaled="1"/>
+                </a:gradFill>
+                <a:sym typeface="+mn-ea"/>
+              </a:rPr>
+              <a:t>的数据</a:t>
+            </a:r>
+            <a:endParaRPr lang="zh-CN" altLang="en-US">
+              <a:gradFill>
+                <a:gsLst>
+                  <a:gs pos="50000">
+                    <a:schemeClr val="accent2"/>
+                  </a:gs>
+                  <a:gs pos="0">
+                    <a:schemeClr val="accent2">
+                      <a:lumMod val="25000"/>
+                      <a:lumOff val="75000"/>
+                    </a:schemeClr>
+                  </a:gs>
+                  <a:gs pos="100000">
+                    <a:schemeClr val="accent2">
+                      <a:lumMod val="85000"/>
+                    </a:schemeClr>
+                  </a:gs>
+                </a:gsLst>
+                <a:lin ang="5400000" scaled="1"/>
+              </a:gradFill>
+            </a:endParaRPr>
+          </a:p>
+          <a:p>
+            <a:endParaRPr lang="zh-CN" altLang="en-US"/>
+          </a:p>
+          <a:p>
+            <a:r>
+              <a:rPr lang="en-US" altLang="zh-CN"/>
+              <a:t>2.</a:t>
+            </a:r>
+            <a:r>
+              <a:rPr lang="zh-CN" altLang="en-US"/>
+              <a:t>模型与真实数据的差异分析（模型是否能很好的</a:t>
+            </a:r>
+            <a:r>
+              <a:rPr lang="zh-CN" altLang="en-US">
+                <a:solidFill>
+                  <a:srgbClr val="FF0000"/>
+                </a:solidFill>
+              </a:rPr>
+              <a:t>捕捉</a:t>
+            </a:r>
+            <a:r>
+              <a:rPr lang="zh-CN" altLang="en-US"/>
+              <a:t>真实被试的实际反应情况）【模型的解释力与捕捉能力】</a:t>
+            </a:r>
+            <a:endParaRPr lang="zh-CN" altLang="en-US"/>
+          </a:p>
+          <a:p>
+            <a:endParaRPr lang="zh-CN" altLang="en-US"/>
+          </a:p>
+          <a:p>
+            <a:endParaRPr lang="zh-CN" altLang="en-US"/>
+          </a:p>
+        </p:txBody>
+      </p:sp>
+    </p:spTree>
+  </p:cSld>
+  <p:clrMapOvr>
+    <a:masterClrMapping/>
+  </p:clrMapOvr>
+</p:sld>
+</file>
+
+<file path=ppt/slides/slide11.xml><?xml version="1.0" encoding="utf-8"?>
+<p:sld xmlns:a="http://schemas.openxmlformats.org/drawingml/2006/main" xmlns:r="http://schemas.openxmlformats.org/officeDocument/2006/relationships" xmlns:p="http://schemas.openxmlformats.org/presentationml/2006/main">
+  <p:cSld>
+    <p:spTree>
+      <p:nvGrpSpPr>
+        <p:cNvPr id="1" name=""/>
+        <p:cNvGrpSpPr/>
+        <p:nvPr/>
+      </p:nvGrpSpPr>
+      <p:grpSpPr/>
     </p:spTree>
   </p:cSld>
   <p:clrMapOvr>
@@ -3639,7 +4297,7 @@
             </a:r>
             <a:r>
               <a:rPr lang="en-US" altLang="zh-CN"/>
-              <a:t>Cohens‘d</a:t>
+              <a:t>Cohens‘d / Self - Other</a:t>
             </a:r>
             <a:r>
               <a:rPr lang="zh-CN" altLang="en-US"/>
@@ -3682,96 +4340,6 @@
               <a:buFont typeface="Wingdings" panose="05000000000000000000" charset="0"/>
               <a:buChar char="Ø"/>
             </a:pPr>
-            <a:r>
-              <a:rPr lang="en-US" altLang="zh-CN"/>
-              <a:t>Layer 3</a:t>
-            </a:r>
-            <a:r>
-              <a:rPr lang="zh-CN" altLang="en-US"/>
-              <a:t>：结构层检验</a:t>
-            </a:r>
-            <a:r>
-              <a:rPr lang="en-US" altLang="zh-CN"/>
-              <a:t>	</a:t>
-            </a:r>
-            <a:r>
-              <a:rPr lang="zh-CN" altLang="en-US">
-                <a:highlight>
-                  <a:srgbClr val="C0C0C0"/>
-                </a:highlight>
-              </a:rPr>
-              <a:t>模型的心理机制是否稳定、可解释、不过拟合？</a:t>
-            </a:r>
-            <a:endParaRPr lang="zh-CN" altLang="en-US">
-              <a:highlight>
-                <a:srgbClr val="C0C0C0"/>
-              </a:highlight>
-            </a:endParaRPr>
-          </a:p>
-          <a:p>
-            <a:pPr marL="800100" lvl="1" indent="-342900" algn="l">
-              <a:buAutoNum type="arabicPeriod"/>
-            </a:pPr>
-            <a:r>
-              <a:rPr lang="zh-CN" altLang="en-US"/>
-              <a:t>参数恢复（</a:t>
-            </a:r>
-            <a:r>
-              <a:rPr lang="en-US" altLang="zh-CN"/>
-              <a:t>parameter recovery</a:t>
-            </a:r>
-            <a:r>
-              <a:rPr lang="zh-CN" altLang="en-US"/>
-              <a:t>）</a:t>
-            </a:r>
-            <a:endParaRPr lang="en-US" altLang="zh-CN"/>
-          </a:p>
-          <a:p>
-            <a:pPr marL="800100" lvl="1" indent="-342900" algn="l">
-              <a:buAutoNum type="arabicPeriod"/>
-            </a:pPr>
-            <a:r>
-              <a:rPr lang="zh-CN" altLang="en-US"/>
-              <a:t>噪声鲁棒性（</a:t>
-            </a:r>
-            <a:r>
-              <a:rPr lang="en-US" altLang="zh-CN"/>
-              <a:t>noise robustness</a:t>
-            </a:r>
-            <a:r>
-              <a:rPr lang="zh-CN" altLang="en-US"/>
-              <a:t>）</a:t>
-            </a:r>
-            <a:endParaRPr lang="en-US" altLang="zh-CN"/>
-          </a:p>
-          <a:p>
-            <a:pPr marL="800100" lvl="1" indent="-342900" algn="l">
-              <a:buAutoNum type="arabicPeriod"/>
-            </a:pPr>
-            <a:r>
-              <a:rPr lang="en-US" altLang="zh-CN"/>
-              <a:t>GP </a:t>
-            </a:r>
-            <a:r>
-              <a:rPr lang="zh-CN" altLang="en-US"/>
-              <a:t>是否只是</a:t>
-            </a:r>
-            <a:r>
-              <a:rPr lang="en-US" altLang="zh-CN"/>
-              <a:t>“</a:t>
-            </a:r>
-            <a:r>
-              <a:rPr lang="zh-CN" altLang="en-US"/>
-              <a:t>插值</a:t>
-            </a:r>
-            <a:r>
-              <a:rPr lang="en-US" altLang="zh-CN"/>
-              <a:t>”</a:t>
-            </a:r>
-            <a:r>
-              <a:rPr lang="zh-CN" altLang="en-US"/>
-              <a:t>，还是有心理意义的不确定性建模</a:t>
-            </a:r>
             <a:endParaRPr lang="zh-CN" altLang="en-US"/>
           </a:p>
           <a:p>
@@ -3779,29 +4347,6 @@
               <a:buFont typeface="Arial" panose="020B0604020202020204" pitchFamily="34" charset="0"/>
               <a:buChar char="•"/>
             </a:pPr>
-            <a:endParaRPr lang="zh-CN" altLang="en-US"/>
-          </a:p>
-          <a:p>
-            <a:r>
-              <a:rPr lang="en-US" altLang="zh-CN"/>
-              <a:t>2.</a:t>
-            </a:r>
-            <a:r>
-              <a:rPr lang="zh-CN" altLang="en-US"/>
-              <a:t>模型与真实数据的差异分析（模型是否能很好的</a:t>
-            </a:r>
-            <a:r>
-              <a:rPr lang="zh-CN" altLang="en-US">
-                <a:solidFill>
-                  <a:srgbClr val="FF0000"/>
-                </a:solidFill>
-              </a:rPr>
-              <a:t>捕捉</a:t>
-            </a:r>
-            <a:r>
-              <a:rPr lang="zh-CN" altLang="en-US"/>
-              <a:t>真实被试的实际反应情况）【模型的解释力与捕捉能力】</a:t>
-            </a:r>
             <a:endParaRPr lang="zh-CN" altLang="en-US"/>
           </a:p>
           <a:p>
@@ -3821,24 +4366,6 @@
 </file>
 
 <file path=ppt/slides/slide3.xml><?xml version="1.0" encoding="utf-8"?>
-<p:sld xmlns:a="http://schemas.openxmlformats.org/drawingml/2006/main" xmlns:r="http://schemas.openxmlformats.org/officeDocument/2006/relationships" xmlns:p="http://schemas.openxmlformats.org/presentationml/2006/main">
-  <p:cSld>
-    <p:spTree>
-      <p:nvGrpSpPr>
-        <p:cNvPr id="1" name=""/>
-        <p:cNvGrpSpPr/>
-        <p:nvPr/>
-      </p:nvGrpSpPr>
-      <p:grpSpPr/>
-    </p:spTree>
-  </p:cSld>
-  <p:clrMapOvr>
-    <a:masterClrMapping/>
-  </p:clrMapOvr>
-</p:sld>
-</file>
-
-<file path=ppt/slides/slide4.xml><?xml version="1.0" encoding="utf-8"?>
 <p:sld xmlns:a="http://schemas.openxmlformats.org/drawingml/2006/main" xmlns:r="http://schemas.openxmlformats.org/officeDocument/2006/relationships" xmlns:p="http://schemas.openxmlformats.org/presentationml/2006/main">
   <p:cSld>
     <p:spTree>
@@ -3871,7 +4398,7 @@
           <a:p>
             <a:r>
               <a:rPr lang="zh-CN" altLang="en-US"/>
-              <a:t>研究具体方法【参考文献篇】</a:t>
+              <a:t>研究具体方法【思路篇】</a:t>
             </a:r>
             <a:endParaRPr lang="zh-CN" altLang="en-US"/>
           </a:p>
@@ -4166,11 +4693,11 @@
           <a:p>
             <a:r>
               <a:rPr lang="en-US" altLang="zh-CN"/>
-              <a:t>1.</a:t>
-            </a:r>
-            <a:r>
-              <a:rPr lang="zh-CN" altLang="en-US"/>
-              <a:t>模型的有效性分析（模型是否能按照</a:t>
+              <a:t>2.</a:t>
+            </a:r>
+            <a:r>
+              <a:rPr lang="zh-CN" altLang="en-US"/>
+              <a:t>模型与真实数据的差异分析（模型是否能很好的</a:t>
             </a:r>
             <a:r>
               <a:rPr lang="zh-CN" altLang="en-US">
@@ -4178,24 +4705,49 @@
                   <a:srgbClr val="FF0000"/>
                 </a:solidFill>
               </a:rPr>
-              <a:t>预期</a:t>
-            </a:r>
-            <a:r>
-              <a:rPr lang="zh-CN" altLang="en-US"/>
-              <a:t>生成数据）【检查模型生成是否按照我们预想进行】</a:t>
-            </a:r>
-            <a:r>
-              <a:rPr lang="en-US" altLang="zh-CN"/>
-              <a:t> </a:t>
-            </a:r>
-            <a:r>
-              <a:rPr lang="zh-CN" altLang="en-US"/>
-              <a:t>参考文献</a:t>
-            </a:r>
-            <a:endParaRPr lang="zh-CN" altLang="en-US"/>
-          </a:p>
-          <a:p>
-            <a:pPr algn="ctr"/>
+              <a:t>捕捉</a:t>
+            </a:r>
+            <a:r>
+              <a:rPr lang="zh-CN" altLang="en-US"/>
+              <a:t>真实被试的实际反应情况）【模型的解释力与捕捉能力】</a:t>
+            </a:r>
+            <a:endParaRPr lang="zh-CN" altLang="en-US"/>
+          </a:p>
+          <a:p>
+            <a:endParaRPr lang="zh-CN" altLang="en-US"/>
+          </a:p>
+          <a:p>
+            <a:pPr marL="285750" lvl="0" indent="-285750" algn="l">
+              <a:buFont typeface="Wingdings" panose="05000000000000000000" charset="0"/>
+              <a:buChar char="Ø"/>
+            </a:pPr>
+            <a:r>
+              <a:rPr lang="en-US" altLang="zh-CN">
+                <a:sym typeface="+mn-ea"/>
+              </a:rPr>
+              <a:t>Layer 3</a:t>
+            </a:r>
+            <a:r>
+              <a:rPr lang="zh-CN" altLang="en-US">
+                <a:sym typeface="+mn-ea"/>
+              </a:rPr>
+              <a:t>：结构层检验</a:t>
+            </a:r>
+            <a:r>
+              <a:rPr lang="en-US" altLang="zh-CN">
+                <a:sym typeface="+mn-ea"/>
+              </a:rPr>
+              <a:t>	</a:t>
+            </a:r>
+            <a:r>
+              <a:rPr lang="zh-CN" altLang="en-US">
+                <a:highlight>
+                  <a:srgbClr val="C0C0C0"/>
+                </a:highlight>
+                <a:sym typeface="+mn-ea"/>
+              </a:rPr>
+              <a:t>模型的心理机制是否稳定、可解释、不过拟合？</a:t>
+            </a:r>
             <a:endParaRPr lang="zh-CN" altLang="en-US">
               <a:highlight>
                 <a:srgbClr val="C0C0C0"/>
@@ -4203,133 +4755,427 @@
             </a:endParaRPr>
           </a:p>
           <a:p>
-            <a:pPr marL="285750" indent="-285750" algn="l">
+            <a:pPr marL="800100" lvl="1" indent="-342900" algn="l">
+              <a:buAutoNum type="arabicPeriod"/>
+            </a:pPr>
+            <a:r>
+              <a:rPr lang="zh-CN" altLang="en-US">
+                <a:sym typeface="+mn-ea"/>
+              </a:rPr>
+              <a:t>参数恢复（</a:t>
+            </a:r>
+            <a:r>
+              <a:rPr lang="en-US" altLang="zh-CN">
+                <a:sym typeface="+mn-ea"/>
+              </a:rPr>
+              <a:t>parameter recovery</a:t>
+            </a:r>
+            <a:r>
+              <a:rPr lang="zh-CN" altLang="en-US">
+                <a:sym typeface="+mn-ea"/>
+              </a:rPr>
+              <a:t>）</a:t>
+            </a:r>
+            <a:r>
+              <a:rPr lang="en-US" altLang="zh-CN">
+                <a:sym typeface="+mn-ea"/>
+              </a:rPr>
+              <a:t> </a:t>
+            </a:r>
+            <a:r>
+              <a:rPr lang="zh-CN" altLang="en-US">
+                <a:sym typeface="+mn-ea"/>
+              </a:rPr>
+              <a:t>【生成已知参数的数据</a:t>
+            </a:r>
+            <a:r>
+              <a:rPr lang="en-US" altLang="zh-CN">
+                <a:sym typeface="+mn-ea"/>
+              </a:rPr>
+              <a:t> </a:t>
+            </a:r>
+            <a:r>
+              <a:rPr lang="en-US" altLang="en-US">
+                <a:sym typeface="+mn-ea"/>
+              </a:rPr>
+              <a:t>→</a:t>
+            </a:r>
+            <a:r>
+              <a:rPr lang="en-US" altLang="zh-CN">
+                <a:sym typeface="+mn-ea"/>
+              </a:rPr>
+              <a:t> </a:t>
+            </a:r>
+            <a:r>
+              <a:rPr lang="zh-CN" altLang="en-US">
+                <a:sym typeface="+mn-ea"/>
+              </a:rPr>
+              <a:t>用</a:t>
+            </a:r>
+            <a:r>
+              <a:rPr lang="en-US" altLang="zh-CN">
+                <a:sym typeface="+mn-ea"/>
+              </a:rPr>
+              <a:t> GP </a:t>
+            </a:r>
+            <a:r>
+              <a:rPr lang="zh-CN" altLang="en-US">
+                <a:sym typeface="+mn-ea"/>
+              </a:rPr>
+              <a:t>拟合</a:t>
+            </a:r>
+            <a:r>
+              <a:rPr lang="en-US" altLang="zh-CN">
+                <a:sym typeface="+mn-ea"/>
+              </a:rPr>
+              <a:t> </a:t>
+            </a:r>
+            <a:r>
+              <a:rPr lang="en-US" altLang="en-US">
+                <a:sym typeface="+mn-ea"/>
+              </a:rPr>
+              <a:t>→</a:t>
+            </a:r>
+            <a:r>
+              <a:rPr lang="en-US" altLang="zh-CN">
+                <a:sym typeface="+mn-ea"/>
+              </a:rPr>
+              <a:t>DDM</a:t>
+            </a:r>
+            <a:r>
+              <a:rPr lang="zh-CN" altLang="en-US">
+                <a:sym typeface="+mn-ea"/>
+              </a:rPr>
+              <a:t>参数</a:t>
+            </a:r>
+            <a:r>
+              <a:rPr lang="en-US" altLang="zh-CN">
+                <a:sym typeface="+mn-ea"/>
+              </a:rPr>
+              <a:t> </a:t>
+            </a:r>
+            <a:r>
+              <a:rPr lang="zh-CN" altLang="en-US">
+                <a:sym typeface="+mn-ea"/>
+              </a:rPr>
+              <a:t>的映射</a:t>
+            </a:r>
+            <a:r>
+              <a:rPr lang="en-US" altLang="zh-CN">
+                <a:sym typeface="+mn-ea"/>
+              </a:rPr>
+              <a:t> </a:t>
+            </a:r>
+            <a:r>
+              <a:rPr lang="en-US" altLang="en-US">
+                <a:sym typeface="+mn-ea"/>
+              </a:rPr>
+              <a:t>→</a:t>
+            </a:r>
+            <a:r>
+              <a:rPr lang="en-US" altLang="zh-CN">
+                <a:sym typeface="+mn-ea"/>
+              </a:rPr>
+              <a:t> </a:t>
+            </a:r>
+            <a:r>
+              <a:rPr lang="zh-CN" altLang="en-US">
+                <a:sym typeface="+mn-ea"/>
+              </a:rPr>
+              <a:t>检验恢复能力】</a:t>
+            </a:r>
+            <a:endParaRPr lang="zh-CN" altLang="en-US"/>
+          </a:p>
+          <a:p>
+            <a:pPr marL="800100" lvl="1" indent="-342900" algn="l">
+              <a:buAutoNum type="arabicPeriod"/>
+            </a:pPr>
+            <a:r>
+              <a:rPr lang="zh-CN" altLang="en-US">
+                <a:sym typeface="+mn-ea"/>
+              </a:rPr>
+              <a:t>噪声鲁棒性（</a:t>
+            </a:r>
+            <a:r>
+              <a:rPr lang="en-US" altLang="zh-CN">
+                <a:sym typeface="+mn-ea"/>
+              </a:rPr>
+              <a:t>noise robustness</a:t>
+            </a:r>
+            <a:r>
+              <a:rPr lang="zh-CN" altLang="en-US">
+                <a:sym typeface="+mn-ea"/>
+              </a:rPr>
+              <a:t>）【生成模型是否稳定，噪音是否会有影响】</a:t>
+            </a:r>
+            <a:endParaRPr lang="zh-CN" altLang="en-US"/>
+          </a:p>
+          <a:p>
+            <a:pPr marL="800100" lvl="1" indent="-342900" algn="l">
+              <a:buAutoNum type="arabicPeriod"/>
+            </a:pPr>
+            <a:r>
+              <a:rPr lang="zh-CN" altLang="en-US">
+                <a:sym typeface="+mn-ea"/>
+              </a:rPr>
+              <a:t>模型可辨识性（</a:t>
+            </a:r>
+            <a:r>
+              <a:rPr lang="en-US" altLang="zh-CN">
+                <a:sym typeface="+mn-ea"/>
+              </a:rPr>
+              <a:t>Model Identifiability</a:t>
+            </a:r>
+            <a:r>
+              <a:rPr lang="zh-CN" altLang="en-US">
+                <a:sym typeface="+mn-ea"/>
+              </a:rPr>
+              <a:t>）【不同的参数组合（</a:t>
+            </a:r>
+            <a:r>
+              <a:rPr lang="en-US" altLang="zh-CN">
+                <a:sym typeface="+mn-ea"/>
+              </a:rPr>
+              <a:t>P|T|W</a:t>
+            </a:r>
+            <a:r>
+              <a:rPr lang="zh-CN" altLang="en-US">
+                <a:sym typeface="+mn-ea"/>
+              </a:rPr>
+              <a:t>）是否会产生可区分的数据】</a:t>
+            </a:r>
+            <a:endParaRPr lang="zh-CN" altLang="en-US">
+              <a:sym typeface="+mn-ea"/>
+            </a:endParaRPr>
+          </a:p>
+          <a:p>
+            <a:pPr marL="800100" lvl="1" indent="-342900" algn="l">
+              <a:buAutoNum type="arabicPeriod"/>
+            </a:pPr>
+            <a:r>
+              <a:rPr lang="en-US" altLang="zh-CN">
+                <a:sym typeface="+mn-ea"/>
+              </a:rPr>
+              <a:t>GP </a:t>
+            </a:r>
+            <a:r>
+              <a:rPr lang="zh-CN" altLang="en-US">
+                <a:sym typeface="+mn-ea"/>
+              </a:rPr>
+              <a:t>是否只是</a:t>
+            </a:r>
+            <a:r>
+              <a:rPr lang="en-US" altLang="zh-CN">
+                <a:sym typeface="+mn-ea"/>
+              </a:rPr>
+              <a:t>“</a:t>
+            </a:r>
+            <a:r>
+              <a:rPr lang="zh-CN" altLang="en-US">
+                <a:sym typeface="+mn-ea"/>
+              </a:rPr>
+              <a:t>插值</a:t>
+            </a:r>
+            <a:r>
+              <a:rPr lang="en-US" altLang="zh-CN">
+                <a:sym typeface="+mn-ea"/>
+              </a:rPr>
+              <a:t>”</a:t>
+            </a:r>
+            <a:r>
+              <a:rPr lang="zh-CN" altLang="en-US">
+                <a:sym typeface="+mn-ea"/>
+              </a:rPr>
+              <a:t>，还是有心理意义的不确定性建模【核函数长度尺度、噪声方差对生成结果的影响】</a:t>
+            </a:r>
+            <a:endParaRPr lang="zh-CN" altLang="en-US">
+              <a:sym typeface="+mn-ea"/>
+            </a:endParaRPr>
+          </a:p>
+          <a:p>
+            <a:pPr marL="800100" lvl="1" indent="-342900" algn="l">
+              <a:buAutoNum type="arabicPeriod"/>
+            </a:pPr>
+            <a:endParaRPr lang="zh-CN" altLang="en-US">
+              <a:sym typeface="+mn-ea"/>
+            </a:endParaRPr>
+          </a:p>
+          <a:p>
+            <a:pPr marL="800100" lvl="1" indent="-342900" algn="l">
+              <a:buAutoNum type="arabicPeriod"/>
+            </a:pPr>
+            <a:endParaRPr lang="en-US" altLang="zh-CN">
+              <a:sym typeface="+mn-ea"/>
+            </a:endParaRPr>
+          </a:p>
+          <a:p>
+            <a:pPr marL="0" lvl="1" algn="l">
+              <a:buClrTx/>
+              <a:buSzTx/>
+              <a:buFontTx/>
+              <a:buNone/>
+            </a:pPr>
+            <a:r>
+              <a:rPr lang="en-US" altLang="zh-CN">
+                <a:sym typeface="+mn-ea"/>
+              </a:rPr>
+              <a:t>3.不同生成模型之间的比较（不同模型之间哪一种</a:t>
+            </a:r>
+            <a:r>
+              <a:rPr lang="en-US" altLang="zh-CN">
+                <a:solidFill>
+                  <a:srgbClr val="FF0000"/>
+                </a:solidFill>
+                <a:sym typeface="+mn-ea"/>
+              </a:rPr>
+              <a:t>更具有</a:t>
+            </a:r>
+            <a:r>
+              <a:rPr lang="en-US" altLang="zh-CN">
+                <a:sym typeface="+mn-ea"/>
+              </a:rPr>
+              <a:t>实际预测效用）【生成模型与生成模型之间的比较】</a:t>
+            </a:r>
+            <a:endParaRPr lang="en-US" altLang="zh-CN"/>
+          </a:p>
+          <a:p>
+            <a:pPr lvl="1" indent="0" algn="l">
+              <a:buNone/>
+            </a:pPr>
+            <a:endParaRPr lang="zh-CN" altLang="en-US"/>
+          </a:p>
+          <a:p>
+            <a:pPr marL="285750" indent="-285750">
               <a:buFont typeface="Wingdings" panose="05000000000000000000" charset="0"/>
               <a:buChar char="Ø"/>
             </a:pPr>
             <a:r>
-              <a:rPr lang="zh-CN" altLang="en-US"/>
-              <a:t>第一类：</a:t>
-            </a:r>
-            <a:r>
-              <a:rPr lang="en-US" altLang="zh-CN"/>
-              <a:t>Posterior / Prior Predictive Checks</a:t>
-            </a:r>
-            <a:r>
-              <a:rPr lang="zh-CN" altLang="en-US"/>
-              <a:t>（分布一致性）</a:t>
-            </a:r>
-            <a:endParaRPr lang="zh-CN" altLang="en-US"/>
-          </a:p>
-          <a:p>
-            <a:pPr indent="457200" algn="ctr">
+              <a:rPr lang="en-US" altLang="zh-CN">
+                <a:sym typeface="+mn-ea"/>
+              </a:rPr>
+              <a:t>Layer 4：</a:t>
+            </a:r>
+            <a:r>
+              <a:rPr lang="en-US" altLang="zh-CN">
+                <a:sym typeface="+mn-ea"/>
+              </a:rPr>
+              <a:t>模型比较（Baseline/Null Model Comparison）</a:t>
+            </a:r>
+            <a:endParaRPr lang="en-US" altLang="zh-CN"/>
+          </a:p>
+          <a:p>
+            <a:pPr marL="800100" lvl="1" indent="-342900">
+              <a:buFont typeface="Wingdings" panose="05000000000000000000" charset="0"/>
+              <a:buAutoNum type="arabicPeriod"/>
+            </a:pPr>
+            <a:r>
+              <a:rPr lang="en-US" altLang="zh-CN">
+                <a:sym typeface="+mn-ea"/>
+              </a:rPr>
+              <a:t>WAIC (Widely Applicable Information Criterion)</a:t>
+            </a:r>
+            <a:endParaRPr lang="en-US" altLang="zh-CN"/>
+          </a:p>
+          <a:p>
+            <a:pPr marL="800100" lvl="1" indent="-342900">
+              <a:buFont typeface="Wingdings" panose="05000000000000000000" charset="0"/>
+              <a:buAutoNum type="arabicPeriod"/>
+            </a:pPr>
+            <a:r>
+              <a:rPr lang="en-US" altLang="zh-CN">
+                <a:sym typeface="+mn-ea"/>
+              </a:rPr>
+              <a:t>LOO-CV (Leave-One-Out Cross-Validation) + PSIS smoothing</a:t>
+            </a:r>
+            <a:endParaRPr lang="en-US" altLang="zh-CN"/>
+          </a:p>
+          <a:p>
+            <a:pPr marL="800100" lvl="1" indent="-342900">
+              <a:buFont typeface="Wingdings" panose="05000000000000000000" charset="0"/>
+              <a:buAutoNum type="arabicPeriod"/>
+            </a:pPr>
+            <a:r>
+              <a:rPr lang="en-US" altLang="zh-CN">
+                <a:sym typeface="+mn-ea"/>
+              </a:rPr>
+              <a:t>ELPD (Expected Log Predictive Density)</a:t>
+            </a:r>
+            <a:endParaRPr lang="en-US" altLang="zh-CN"/>
+          </a:p>
+          <a:p>
+            <a:pPr indent="0">
+              <a:buFont typeface="Wingdings" panose="05000000000000000000" charset="0"/>
               <a:buNone/>
             </a:pPr>
-            <a:r>
-              <a:rPr lang="zh-CN" altLang="en-US">
-                <a:highlight>
-                  <a:srgbClr val="C0C0C0"/>
-                </a:highlight>
-              </a:rPr>
-              <a:t>这个模型，是否能生成在统计分布层面</a:t>
-            </a:r>
-            <a:r>
-              <a:rPr lang="en-US" altLang="zh-CN">
-                <a:highlight>
-                  <a:srgbClr val="C0C0C0"/>
-                </a:highlight>
-              </a:rPr>
-              <a:t>“</a:t>
-            </a:r>
-            <a:r>
-              <a:rPr lang="zh-CN" altLang="en-US">
-                <a:highlight>
-                  <a:srgbClr val="C0C0C0"/>
-                </a:highlight>
-              </a:rPr>
-              <a:t>看起来像真实数据</a:t>
-            </a:r>
-            <a:r>
-              <a:rPr lang="en-US" altLang="zh-CN">
-                <a:highlight>
-                  <a:srgbClr val="C0C0C0"/>
-                </a:highlight>
-              </a:rPr>
-              <a:t>”</a:t>
-            </a:r>
-            <a:r>
-              <a:rPr lang="zh-CN" altLang="en-US">
-                <a:highlight>
-                  <a:srgbClr val="C0C0C0"/>
-                </a:highlight>
-              </a:rPr>
-              <a:t>的数据？</a:t>
-            </a:r>
-            <a:r>
-              <a:rPr lang="en-US" altLang="zh-CN">
-                <a:highlight>
-                  <a:srgbClr val="C0C0C0"/>
-                </a:highlight>
-              </a:rPr>
-              <a:t>	</a:t>
-            </a:r>
-            <a:endParaRPr lang="zh-CN" altLang="en-US">
-              <a:highlight>
-                <a:srgbClr val="C0C0C0"/>
-              </a:highlight>
-            </a:endParaRPr>
-          </a:p>
-          <a:p>
-            <a:pPr marL="800100" lvl="1" indent="-342900" algn="l">
-              <a:buAutoNum type="arabicPeriod"/>
+            <a:endParaRPr lang="en-US" altLang="zh-CN"/>
+          </a:p>
+          <a:p>
+            <a:pPr lvl="1" indent="0" algn="l">
+              <a:buNone/>
             </a:pPr>
-            <a:r>
-              <a:rPr lang="en-US" altLang="zh-CN"/>
-              <a:t>Gelman, A., Carlin, J. B., Stern, H. S., Dunson, D. B., Vehtari, A., &amp; Rubin, D. B. (2013).Bayesian data analysis (3rd ed.). Boca Raton, FL: CRC Press.</a:t>
-            </a:r>
+            <a:endParaRPr lang="zh-CN" altLang="en-US"/>
+          </a:p>
+          <a:p>
+            <a:pPr marL="285750" indent="-285750">
+              <a:buFont typeface="Wingdings" panose="05000000000000000000" charset="0"/>
+              <a:buChar char="Ø"/>
+            </a:pPr>
             <a:endParaRPr lang="en-US" altLang="zh-CN"/>
           </a:p>
           <a:p>
-            <a:pPr marL="800100" lvl="1" indent="-342900" algn="l">
-              <a:buAutoNum type="arabicPeriod"/>
-            </a:pPr>
-            <a:r>
-              <a:rPr lang="en-US" altLang="zh-CN"/>
-              <a:t>Gelman, A., Vehtari, A., Simpson, D., Margossian, C. C., Carpenter, B., Yao, Y., … Modr</a:t>
-            </a:r>
-            <a:r>
-              <a:rPr lang="en-US" altLang="en-US"/>
-              <a:t>á</a:t>
-            </a:r>
-            <a:r>
-              <a:rPr lang="en-US" altLang="zh-CN"/>
-              <a:t>k, M. (2020).Bayesian workflow. arXiv preprint arXiv:2011.01808.</a:t>
-            </a:r>
-            <a:endParaRPr lang="en-US" altLang="zh-CN"/>
-          </a:p>
-          <a:p>
-            <a:pPr marL="800100" lvl="1" indent="-342900" algn="l">
-              <a:buAutoNum type="arabicPeriod"/>
-            </a:pPr>
-            <a:r>
-              <a:rPr lang="en-US" altLang="zh-CN"/>
-              <a:t>Brown, S. D., &amp; Heathcote, A. (2008).The simplest complete model of choice response time: Linear ballistic accumulation.Cognitive Psychology, 57(3), 153–178. https://doi.org/10.1016/j.cogpsych.2007.12.002</a:t>
-            </a:r>
-            <a:endParaRPr lang="en-US" altLang="zh-CN"/>
-          </a:p>
-          <a:p>
-            <a:pPr marL="800100" lvl="1" indent="-342900" algn="l">
-              <a:buAutoNum type="arabicPeriod"/>
-            </a:pPr>
-            <a:r>
-              <a:rPr lang="en-US" altLang="zh-CN"/>
-              <a:t>Lee, M. D., &amp; Wagenmakers, E.-J. (2013).Bayesian cognitive modeling: A practical course. Cambridge: Cambridge University Press.</a:t>
-            </a:r>
-            <a:endParaRPr lang="en-US" altLang="zh-CN"/>
-          </a:p>
-          <a:p>
-            <a:endParaRPr lang="zh-CN" altLang="en-US"/>
-          </a:p>
+            <a:endParaRPr lang="zh-CN" altLang="en-US"/>
+          </a:p>
+        </p:txBody>
+      </p:sp>
+    </p:spTree>
+  </p:cSld>
+  <p:clrMapOvr>
+    <a:masterClrMapping/>
+  </p:clrMapOvr>
+</p:sld>
+</file>
+
+<file path=ppt/slides/slide4.xml><?xml version="1.0" encoding="utf-8"?>
+<p:sld xmlns:a="http://schemas.openxmlformats.org/drawingml/2006/main" xmlns:r="http://schemas.openxmlformats.org/officeDocument/2006/relationships" xmlns:p="http://schemas.openxmlformats.org/presentationml/2006/main">
+  <p:cSld>
+    <p:spTree>
+      <p:nvGrpSpPr>
+        <p:cNvPr id="1" name=""/>
+        <p:cNvGrpSpPr/>
+        <p:nvPr/>
+      </p:nvGrpSpPr>
+      <p:grpSpPr/>
+      <p:sp>
+        <p:nvSpPr>
+          <p:cNvPr id="2" name="标题 1"/>
+          <p:cNvSpPr>
+            <a:spLocks noGrp="1"/>
+          </p:cNvSpPr>
+          <p:nvPr>
+            <p:ph type="title"/>
+          </p:nvPr>
+        </p:nvSpPr>
+        <p:spPr/>
+        <p:txBody>
+          <a:bodyPr/>
+          <a:p>
+            <a:endParaRPr lang="zh-CN" altLang="en-US"/>
+          </a:p>
+        </p:txBody>
+      </p:sp>
+      <p:sp>
+        <p:nvSpPr>
+          <p:cNvPr id="3" name="内容占位符 2"/>
+          <p:cNvSpPr>
+            <a:spLocks noGrp="1"/>
+          </p:cNvSpPr>
+          <p:nvPr>
+            <p:ph idx="1"/>
+          </p:nvPr>
+        </p:nvSpPr>
+        <p:spPr/>
+        <p:txBody>
+          <a:bodyPr/>
           <a:p>
             <a:endParaRPr lang="zh-CN" altLang="en-US"/>
           </a:p>
@@ -4353,482 +5199,6 @@
         <p:nvPr/>
       </p:nvGrpSpPr>
       <p:grpSpPr/>
-      <p:sp>
-        <p:nvSpPr>
-          <p:cNvPr id="5" name="文本框 4"/>
-          <p:cNvSpPr txBox="1"/>
-          <p:nvPr/>
-        </p:nvSpPr>
-        <p:spPr>
-          <a:xfrm>
-            <a:off x="525780" y="429260"/>
-            <a:ext cx="11115040" cy="5984240"/>
-          </a:xfrm>
-          <a:prstGeom prst="rect">
-            <a:avLst/>
-          </a:prstGeom>
-          <a:noFill/>
-        </p:spPr>
-        <p:txBody>
-          <a:bodyPr wrap="square" rtlCol="0">
-            <a:noAutofit/>
-          </a:bodyPr>
-          <a:p>
-            <a:r>
-              <a:rPr lang="zh-CN" altLang="en-US"/>
-              <a:t>研究具体方法【</a:t>
-            </a:r>
-            <a:r>
-              <a:rPr lang="zh-CN" altLang="en-US">
-                <a:sym typeface="+mn-ea"/>
-              </a:rPr>
-              <a:t>参考文献篇</a:t>
-            </a:r>
-            <a:r>
-              <a:rPr lang="zh-CN" altLang="en-US"/>
-              <a:t>】</a:t>
-            </a:r>
-            <a:endParaRPr lang="zh-CN" altLang="en-US"/>
-          </a:p>
-          <a:p>
-            <a:pPr algn="ctr"/>
-            <a:r>
-              <a:rPr lang="zh-CN" altLang="en-US">
-                <a:highlight>
-                  <a:srgbClr val="FFFF00"/>
-                </a:highlight>
-                <a:sym typeface="+mn-ea"/>
-              </a:rPr>
-              <a:t>实验设计空间</a:t>
-            </a:r>
-            <a:r>
-              <a:rPr lang="en-US" altLang="zh-CN">
-                <a:highlight>
-                  <a:srgbClr val="FFFF00"/>
-                </a:highlight>
-                <a:sym typeface="+mn-ea"/>
-              </a:rPr>
-              <a:t> Ω </a:t>
-            </a:r>
-            <a:r>
-              <a:rPr lang="en-US" altLang="en-US">
-                <a:highlight>
-                  <a:srgbClr val="FFFF00"/>
-                </a:highlight>
-                <a:sym typeface="+mn-ea"/>
-              </a:rPr>
-              <a:t>→</a:t>
-            </a:r>
-            <a:r>
-              <a:rPr lang="en-US" altLang="zh-CN">
-                <a:highlight>
-                  <a:srgbClr val="FFFF00"/>
-                </a:highlight>
-                <a:sym typeface="+mn-ea"/>
-              </a:rPr>
-              <a:t> </a:t>
-            </a:r>
-            <a:r>
-              <a:rPr lang="zh-CN" altLang="en-US">
-                <a:highlight>
-                  <a:srgbClr val="FFFF00"/>
-                </a:highlight>
-                <a:sym typeface="+mn-ea"/>
-              </a:rPr>
-              <a:t>潜在心理参数（</a:t>
-            </a:r>
-            <a:r>
-              <a:rPr lang="en-US" altLang="zh-CN">
-                <a:highlight>
-                  <a:srgbClr val="FFFF00"/>
-                </a:highlight>
-                <a:sym typeface="+mn-ea"/>
-              </a:rPr>
-              <a:t>DDM</a:t>
-            </a:r>
-            <a:r>
-              <a:rPr lang="zh-CN" altLang="en-US">
-                <a:highlight>
-                  <a:srgbClr val="FFFF00"/>
-                </a:highlight>
-                <a:sym typeface="+mn-ea"/>
-              </a:rPr>
-              <a:t>）</a:t>
-            </a:r>
-            <a:r>
-              <a:rPr lang="en-US" altLang="zh-CN">
-                <a:highlight>
-                  <a:srgbClr val="FFFF00"/>
-                </a:highlight>
-                <a:sym typeface="+mn-ea"/>
-              </a:rPr>
-              <a:t> </a:t>
-            </a:r>
-            <a:r>
-              <a:rPr lang="en-US" altLang="en-US">
-                <a:highlight>
-                  <a:srgbClr val="FFFF00"/>
-                </a:highlight>
-                <a:sym typeface="+mn-ea"/>
-              </a:rPr>
-              <a:t>→</a:t>
-            </a:r>
-            <a:r>
-              <a:rPr lang="en-US" altLang="zh-CN">
-                <a:highlight>
-                  <a:srgbClr val="FFFF00"/>
-                </a:highlight>
-                <a:sym typeface="+mn-ea"/>
-              </a:rPr>
-              <a:t> </a:t>
-            </a:r>
-            <a:r>
-              <a:rPr lang="zh-CN" altLang="en-US">
-                <a:highlight>
-                  <a:srgbClr val="FFFF00"/>
-                </a:highlight>
-                <a:sym typeface="+mn-ea"/>
-              </a:rPr>
-              <a:t>行为数据（</a:t>
-            </a:r>
-            <a:r>
-              <a:rPr lang="en-US" altLang="zh-CN">
-                <a:highlight>
-                  <a:srgbClr val="FFFF00"/>
-                </a:highlight>
-                <a:sym typeface="+mn-ea"/>
-              </a:rPr>
-              <a:t>RT, ACC</a:t>
-            </a:r>
-            <a:r>
-              <a:rPr lang="zh-CN" altLang="en-US">
-                <a:highlight>
-                  <a:srgbClr val="FFFF00"/>
-                </a:highlight>
-                <a:sym typeface="+mn-ea"/>
-              </a:rPr>
-              <a:t>）</a:t>
-            </a:r>
-            <a:endParaRPr lang="zh-CN" altLang="en-US"/>
-          </a:p>
-          <a:p>
-            <a:r>
-              <a:rPr lang="zh-CN" altLang="en-US"/>
-              <a:t>一、生成模型的检验【</a:t>
-            </a:r>
-            <a:r>
-              <a:rPr lang="en-US" altLang="zh-CN"/>
-              <a:t>model checking</a:t>
-            </a:r>
-            <a:r>
-              <a:rPr lang="zh-CN" altLang="en-US"/>
-              <a:t>】</a:t>
-            </a:r>
-            <a:r>
-              <a:rPr lang="en-US" altLang="zh-CN"/>
-              <a:t>  </a:t>
-            </a:r>
-            <a:r>
-              <a:rPr lang="zh-CN" altLang="en-US">
-                <a:gradFill>
-                  <a:gsLst>
-                    <a:gs pos="50000">
-                      <a:schemeClr val="accent2"/>
-                    </a:gs>
-                    <a:gs pos="0">
-                      <a:schemeClr val="accent2">
-                        <a:lumMod val="25000"/>
-                        <a:lumOff val="75000"/>
-                      </a:schemeClr>
-                    </a:gs>
-                    <a:gs pos="100000">
-                      <a:schemeClr val="accent2">
-                        <a:lumMod val="85000"/>
-                      </a:schemeClr>
-                    </a:gs>
-                  </a:gsLst>
-                  <a:lin ang="5400000" scaled="1"/>
-                </a:gradFill>
-                <a:sym typeface="+mn-ea"/>
-              </a:rPr>
-              <a:t>模型在多层级、多统计量、多不确定性条件下，是否能生成</a:t>
-            </a:r>
-            <a:r>
-              <a:rPr lang="en-US" altLang="zh-CN">
-                <a:gradFill>
-                  <a:gsLst>
-                    <a:gs pos="50000">
-                      <a:schemeClr val="accent2"/>
-                    </a:gs>
-                    <a:gs pos="0">
-                      <a:schemeClr val="accent2">
-                        <a:lumMod val="25000"/>
-                        <a:lumOff val="75000"/>
-                      </a:schemeClr>
-                    </a:gs>
-                    <a:gs pos="100000">
-                      <a:schemeClr val="accent2">
-                        <a:lumMod val="85000"/>
-                      </a:schemeClr>
-                    </a:gs>
-                  </a:gsLst>
-                  <a:lin ang="5400000" scaled="1"/>
-                </a:gradFill>
-                <a:sym typeface="+mn-ea"/>
-              </a:rPr>
-              <a:t>“</a:t>
-            </a:r>
-            <a:r>
-              <a:rPr lang="zh-CN" altLang="en-US">
-                <a:gradFill>
-                  <a:gsLst>
-                    <a:gs pos="50000">
-                      <a:schemeClr val="accent2"/>
-                    </a:gs>
-                    <a:gs pos="0">
-                      <a:schemeClr val="accent2">
-                        <a:lumMod val="25000"/>
-                        <a:lumOff val="75000"/>
-                      </a:schemeClr>
-                    </a:gs>
-                    <a:gs pos="100000">
-                      <a:schemeClr val="accent2">
-                        <a:lumMod val="85000"/>
-                      </a:schemeClr>
-                    </a:gs>
-                  </a:gsLst>
-                  <a:lin ang="5400000" scaled="1"/>
-                </a:gradFill>
-                <a:sym typeface="+mn-ea"/>
-              </a:rPr>
-              <a:t>看起来像人类</a:t>
-            </a:r>
-            <a:r>
-              <a:rPr lang="en-US" altLang="zh-CN">
-                <a:gradFill>
-                  <a:gsLst>
-                    <a:gs pos="50000">
-                      <a:schemeClr val="accent2"/>
-                    </a:gs>
-                    <a:gs pos="0">
-                      <a:schemeClr val="accent2">
-                        <a:lumMod val="25000"/>
-                        <a:lumOff val="75000"/>
-                      </a:schemeClr>
-                    </a:gs>
-                    <a:gs pos="100000">
-                      <a:schemeClr val="accent2">
-                        <a:lumMod val="85000"/>
-                      </a:schemeClr>
-                    </a:gs>
-                  </a:gsLst>
-                  <a:lin ang="5400000" scaled="1"/>
-                </a:gradFill>
-                <a:sym typeface="+mn-ea"/>
-              </a:rPr>
-              <a:t>”</a:t>
-            </a:r>
-            <a:r>
-              <a:rPr lang="zh-CN" altLang="en-US">
-                <a:gradFill>
-                  <a:gsLst>
-                    <a:gs pos="50000">
-                      <a:schemeClr val="accent2"/>
-                    </a:gs>
-                    <a:gs pos="0">
-                      <a:schemeClr val="accent2">
-                        <a:lumMod val="25000"/>
-                        <a:lumOff val="75000"/>
-                      </a:schemeClr>
-                    </a:gs>
-                    <a:gs pos="100000">
-                      <a:schemeClr val="accent2">
-                        <a:lumMod val="85000"/>
-                      </a:schemeClr>
-                    </a:gs>
-                  </a:gsLst>
-                  <a:lin ang="5400000" scaled="1"/>
-                </a:gradFill>
-                <a:sym typeface="+mn-ea"/>
-              </a:rPr>
-              <a:t>的数据</a:t>
-            </a:r>
-            <a:endParaRPr lang="zh-CN" altLang="en-US">
-              <a:gradFill>
-                <a:gsLst>
-                  <a:gs pos="50000">
-                    <a:schemeClr val="accent2"/>
-                  </a:gs>
-                  <a:gs pos="0">
-                    <a:schemeClr val="accent2">
-                      <a:lumMod val="25000"/>
-                      <a:lumOff val="75000"/>
-                    </a:schemeClr>
-                  </a:gs>
-                  <a:gs pos="100000">
-                    <a:schemeClr val="accent2">
-                      <a:lumMod val="85000"/>
-                    </a:schemeClr>
-                  </a:gs>
-                </a:gsLst>
-                <a:lin ang="5400000" scaled="1"/>
-              </a:gradFill>
-            </a:endParaRPr>
-          </a:p>
-          <a:p>
-            <a:endParaRPr lang="zh-CN" altLang="en-US"/>
-          </a:p>
-          <a:p>
-            <a:r>
-              <a:rPr lang="en-US" altLang="zh-CN"/>
-              <a:t>1.</a:t>
-            </a:r>
-            <a:r>
-              <a:rPr lang="zh-CN" altLang="en-US"/>
-              <a:t>模型的有效性分析（模型是否能按照</a:t>
-            </a:r>
-            <a:r>
-              <a:rPr lang="zh-CN" altLang="en-US">
-                <a:solidFill>
-                  <a:srgbClr val="FF0000"/>
-                </a:solidFill>
-              </a:rPr>
-              <a:t>预期</a:t>
-            </a:r>
-            <a:r>
-              <a:rPr lang="zh-CN" altLang="en-US"/>
-              <a:t>生成数据）【检查模型生成是否按照我们预想进行】</a:t>
-            </a:r>
-            <a:r>
-              <a:rPr lang="en-US" altLang="zh-CN"/>
-              <a:t> </a:t>
-            </a:r>
-            <a:r>
-              <a:rPr lang="zh-CN" altLang="en-US"/>
-              <a:t>参考文献</a:t>
-            </a:r>
-            <a:endParaRPr lang="zh-CN" altLang="en-US"/>
-          </a:p>
-          <a:p>
-            <a:pPr algn="ctr"/>
-            <a:endParaRPr lang="zh-CN" altLang="en-US">
-              <a:highlight>
-                <a:srgbClr val="C0C0C0"/>
-              </a:highlight>
-            </a:endParaRPr>
-          </a:p>
-          <a:p>
-            <a:pPr marL="285750" indent="-285750" algn="l">
-              <a:buFont typeface="Wingdings" panose="05000000000000000000" charset="0"/>
-              <a:buChar char="Ø"/>
-            </a:pPr>
-            <a:r>
-              <a:rPr lang="zh-CN" altLang="en-US"/>
-              <a:t>第二类：</a:t>
-            </a:r>
-            <a:r>
-              <a:rPr lang="en-US" altLang="zh-CN"/>
-              <a:t>Effect-level checks</a:t>
-            </a:r>
-            <a:r>
-              <a:rPr lang="zh-CN" altLang="en-US"/>
-              <a:t>（心理效应是否自然涌现）</a:t>
-            </a:r>
-            <a:endParaRPr lang="zh-CN" altLang="en-US"/>
-          </a:p>
-          <a:p>
-            <a:pPr indent="457200" algn="ctr">
-              <a:buNone/>
-            </a:pPr>
-            <a:r>
-              <a:rPr lang="zh-CN" altLang="en-US">
-                <a:highlight>
-                  <a:srgbClr val="C0C0C0"/>
-                </a:highlight>
-              </a:rPr>
-              <a:t>模型是否在</a:t>
-            </a:r>
-            <a:r>
-              <a:rPr lang="en-US" altLang="zh-CN">
-                <a:highlight>
-                  <a:srgbClr val="C0C0C0"/>
-                </a:highlight>
-              </a:rPr>
-              <a:t>“</a:t>
-            </a:r>
-            <a:r>
-              <a:rPr lang="zh-CN" altLang="en-US">
-                <a:highlight>
-                  <a:srgbClr val="C0C0C0"/>
-                </a:highlight>
-              </a:rPr>
-              <a:t>没有强行编码</a:t>
-            </a:r>
-            <a:r>
-              <a:rPr lang="en-US" altLang="zh-CN">
-                <a:highlight>
-                  <a:srgbClr val="C0C0C0"/>
-                </a:highlight>
-              </a:rPr>
-              <a:t>”</a:t>
-            </a:r>
-            <a:r>
-              <a:rPr lang="zh-CN" altLang="en-US">
-                <a:highlight>
-                  <a:srgbClr val="C0C0C0"/>
-                </a:highlight>
-              </a:rPr>
-              <a:t>的情况下，仍然能生成目标心理效应？</a:t>
-            </a:r>
-            <a:r>
-              <a:rPr lang="en-US" altLang="zh-CN">
-                <a:highlight>
-                  <a:srgbClr val="C0C0C0"/>
-                </a:highlight>
-              </a:rPr>
-              <a:t>	</a:t>
-            </a:r>
-            <a:endParaRPr lang="zh-CN" altLang="en-US">
-              <a:highlight>
-                <a:srgbClr val="C0C0C0"/>
-              </a:highlight>
-            </a:endParaRPr>
-          </a:p>
-          <a:p>
-            <a:pPr marL="800100" lvl="1" indent="-342900" algn="l">
-              <a:buAutoNum type="arabicPeriod"/>
-            </a:pPr>
-            <a:r>
-              <a:rPr lang="en-US" altLang="zh-CN"/>
-              <a:t>Scheel, A. M., Schijen, M. R. J., &amp; Lakens, D. (2021).An excess of positive results: Comparing the standard psychology literature with registered reports.Advances in Methods and Practices in Psychological Science, 4(2), 1–12.https://doi.org/10.1177/25152459211007467</a:t>
-            </a:r>
-            <a:endParaRPr lang="en-US" altLang="zh-CN"/>
-          </a:p>
-          <a:p>
-            <a:pPr marL="800100" lvl="1" indent="-342900" algn="l">
-              <a:buAutoNum type="arabicPeriod"/>
-            </a:pPr>
-            <a:r>
-              <a:rPr lang="en-US" altLang="zh-CN"/>
-              <a:t>Oberauer, K., &amp; Lewandowsky, S. (2019).Addressing the theory crisis in psychology.Psychonomic Bulletin &amp; Review, 26(5), 1596–1618.https://doi.org/10.3758/s13423-019-01645-2</a:t>
-            </a:r>
-            <a:endParaRPr lang="en-US" altLang="zh-CN"/>
-          </a:p>
-          <a:p>
-            <a:pPr marL="800100" lvl="1" indent="-342900" algn="l">
-              <a:buAutoNum type="arabicPeriod"/>
-            </a:pPr>
-            <a:r>
-              <a:rPr lang="en-US" altLang="zh-CN"/>
-              <a:t>Sui, J., He, X., &amp; Humphreys, G. W. (2012).Perceptual effects of social salience: Evidence from self-prioritization effects on perceptual matching.Journal of Experimental Psychology: Human Perception and Performance, 38(5), 1105–1117.https://doi.org/10.1037/a0029792</a:t>
-            </a:r>
-            <a:endParaRPr lang="en-US" altLang="zh-CN"/>
-          </a:p>
-          <a:p>
-            <a:endParaRPr lang="zh-CN" altLang="en-US"/>
-          </a:p>
-        </p:txBody>
-      </p:sp>
     </p:spTree>
   </p:cSld>
   <p:clrMapOvr>
@@ -4870,17 +5240,7 @@
           <a:p>
             <a:r>
               <a:rPr lang="zh-CN" altLang="en-US"/>
-              <a:t>研究具体方法【</a:t>
-            </a:r>
-            <a:r>
-              <a:rPr lang="zh-CN" altLang="en-US">
-                <a:sym typeface="+mn-ea"/>
-              </a:rPr>
-              <a:t>参考文献篇</a:t>
-            </a:r>
-            <a:r>
-              <a:rPr lang="zh-CN" altLang="en-US"/>
-              <a:t>】</a:t>
+              <a:t>研究具体方法【思路篇】</a:t>
             </a:r>
             <a:endParaRPr lang="zh-CN" altLang="en-US"/>
           </a:p>
@@ -5193,14 +5553,6 @@
               <a:rPr lang="zh-CN" altLang="en-US"/>
               <a:t>生成数据）【检查模型生成是否按照我们预想进行】</a:t>
             </a:r>
-            <a:r>
-              <a:rPr lang="en-US" altLang="zh-CN"/>
-              <a:t> </a:t>
-            </a:r>
-            <a:r>
-              <a:rPr lang="zh-CN" altLang="en-US"/>
-              <a:t>参考文献</a:t>
-            </a:r>
             <a:endParaRPr lang="zh-CN" altLang="en-US"/>
           </a:p>
           <a:p>
@@ -5217,70 +5569,24 @@
               <a:buChar char="Ø"/>
             </a:pPr>
             <a:r>
-              <a:rPr lang="zh-CN" altLang="en-US"/>
-              <a:t>第三类：结构</a:t>
-            </a:r>
-            <a:r>
-              <a:rPr lang="en-US" altLang="zh-CN"/>
-              <a:t> / </a:t>
-            </a:r>
-            <a:r>
-              <a:rPr lang="zh-CN" altLang="en-US"/>
-              <a:t>过程层检验（可解释性与鲁棒性）</a:t>
-            </a:r>
-            <a:endParaRPr lang="zh-CN" altLang="en-US"/>
-          </a:p>
-          <a:p>
-            <a:pPr indent="457200" algn="ctr">
-              <a:buNone/>
-            </a:pPr>
+              <a:rPr lang="en-US" altLang="zh-CN"/>
+              <a:t>Layer 1</a:t>
+            </a:r>
+            <a:r>
+              <a:rPr lang="zh-CN" altLang="en-US"/>
+              <a:t>：分布层检验</a:t>
+            </a:r>
+            <a:r>
+              <a:rPr lang="en-US" altLang="zh-CN"/>
+              <a:t>	</a:t>
+            </a:r>
             <a:r>
               <a:rPr lang="zh-CN" altLang="en-US">
                 <a:highlight>
                   <a:srgbClr val="C0C0C0"/>
                 </a:highlight>
               </a:rPr>
-              <a:t>模型的心理机制是否可识别、稳定，而不是</a:t>
-            </a:r>
-            <a:r>
-              <a:rPr lang="en-US" altLang="zh-CN">
-                <a:highlight>
-                  <a:srgbClr val="C0C0C0"/>
-                </a:highlight>
-              </a:rPr>
-              <a:t>“</a:t>
-            </a:r>
-            <a:r>
-              <a:rPr lang="zh-CN" altLang="en-US">
-                <a:highlight>
-                  <a:srgbClr val="C0C0C0"/>
-                </a:highlight>
-              </a:rPr>
-              <a:t>参数万能解释器</a:t>
-            </a:r>
-            <a:r>
-              <a:rPr lang="en-US" altLang="zh-CN">
-                <a:highlight>
-                  <a:srgbClr val="C0C0C0"/>
-                </a:highlight>
-              </a:rPr>
-              <a:t>”</a:t>
-            </a:r>
-            <a:r>
-              <a:rPr lang="zh-CN" altLang="en-US">
-                <a:highlight>
-                  <a:srgbClr val="C0C0C0"/>
-                </a:highlight>
-              </a:rPr>
-              <a:t>？</a:t>
-            </a:r>
-            <a:r>
-              <a:rPr lang="en-US" altLang="zh-CN">
-                <a:highlight>
-                  <a:srgbClr val="C0C0C0"/>
-                </a:highlight>
-              </a:rPr>
-              <a:t>	</a:t>
+              <a:t>模型生成的数据，在最基本的统计结构上是否合理？</a:t>
             </a:r>
             <a:endParaRPr lang="zh-CN" altLang="en-US">
               <a:highlight>
@@ -5294,7 +5600,19 @@
             </a:pPr>
             <a:r>
               <a:rPr lang="en-US" altLang="zh-CN"/>
-              <a:t>Palminteri, S., Wyart, V., &amp; Koechlin, E. (2017).The importance of falsification in computational cognitive modeling.Trends in Cognitive Sciences, 21(6), 425–433.https://doi.org/10.1016/j.tics.2017.03.011</a:t>
+              <a:t>RT </a:t>
+            </a:r>
+            <a:r>
+              <a:rPr lang="zh-CN" altLang="en-US"/>
+              <a:t>分布形态（右偏、长尾、</a:t>
+            </a:r>
+            <a:r>
+              <a:rPr lang="en-US" altLang="zh-CN"/>
+              <a:t>0-2s</a:t>
+            </a:r>
+            <a:r>
+              <a:rPr lang="zh-CN" altLang="en-US"/>
+              <a:t>内）</a:t>
             </a:r>
             <a:endParaRPr lang="en-US" altLang="zh-CN"/>
           </a:p>
@@ -5303,8 +5621,16 @@
               <a:buAutoNum type="arabicPeriod"/>
             </a:pPr>
             <a:r>
-              <a:rPr lang="en-US" altLang="zh-CN"/>
-              <a:t>Heathcote, A., Brown, S. D., &amp; Wagenmakers, E.-J. (2015).An introduction to good practices in cognitive modeling.Psychological Methods, 20(4), 401–421.https://doi.org/10.1037/met0000047</a:t>
+              <a:rPr lang="zh-CN" altLang="en-US"/>
+              <a:t>正确</a:t>
+            </a:r>
+            <a:r>
+              <a:rPr lang="en-US" altLang="zh-CN"/>
+              <a:t>/</a:t>
+            </a:r>
+            <a:r>
+              <a:rPr lang="zh-CN" altLang="en-US"/>
+              <a:t>错误反应比例（天花板、地板效应）</a:t>
             </a:r>
             <a:endParaRPr lang="en-US" altLang="zh-CN"/>
           </a:p>
@@ -5313,10 +5639,350 @@
               <a:buAutoNum type="arabicPeriod"/>
             </a:pPr>
             <a:r>
-              <a:rPr lang="en-US" altLang="zh-CN"/>
-              <a:t>Wilson, R. C., &amp; Adams, R. A. (2013).Gaussian process kernels for pattern discovery and extrapolation.arXiv preprint arXiv:1302.4245.</a:t>
+              <a:rPr lang="zh-CN" altLang="en-US"/>
+              <a:t>条件差异（</a:t>
+            </a:r>
+            <a:r>
+              <a:rPr lang="en-US" altLang="zh-CN"/>
+              <a:t>Self vs Other, Matching vs Nonmatching</a:t>
+            </a:r>
+            <a:r>
+              <a:rPr lang="zh-CN" altLang="en-US"/>
+              <a:t>）</a:t>
+            </a:r>
+            <a:endParaRPr lang="zh-CN" altLang="en-US"/>
+          </a:p>
+          <a:p>
+            <a:pPr marL="285750" indent="-285750" algn="l">
+              <a:buFont typeface="Arial" panose="020B0604020202020204" pitchFamily="34" charset="0"/>
+              <a:buChar char="•"/>
+            </a:pPr>
+            <a:endParaRPr lang="zh-CN" altLang="en-US"/>
+          </a:p>
+          <a:p>
+            <a:pPr marL="285750" indent="-285750" algn="l">
+              <a:buFont typeface="Wingdings" panose="05000000000000000000" charset="0"/>
+              <a:buChar char="Ø"/>
+            </a:pPr>
+            <a:r>
+              <a:rPr lang="en-US" altLang="zh-CN"/>
+              <a:t>Layer 2</a:t>
+            </a:r>
+            <a:r>
+              <a:rPr lang="zh-CN" altLang="en-US"/>
+              <a:t>：效应层检验</a:t>
+            </a:r>
+            <a:r>
+              <a:rPr lang="en-US" altLang="zh-CN"/>
+              <a:t>	</a:t>
+            </a:r>
+            <a:r>
+              <a:rPr lang="zh-CN" altLang="en-US">
+                <a:highlight>
+                  <a:srgbClr val="C0C0C0"/>
+                </a:highlight>
+              </a:rPr>
+              <a:t>模型是否能</a:t>
+            </a:r>
+            <a:r>
+              <a:rPr lang="en-US" altLang="zh-CN">
+                <a:highlight>
+                  <a:srgbClr val="C0C0C0"/>
+                </a:highlight>
+              </a:rPr>
+              <a:t>“</a:t>
+            </a:r>
+            <a:r>
+              <a:rPr lang="zh-CN" altLang="en-US">
+                <a:highlight>
+                  <a:srgbClr val="C0C0C0"/>
+                </a:highlight>
+              </a:rPr>
+              <a:t>自然地产生</a:t>
+            </a:r>
+            <a:r>
+              <a:rPr lang="en-US" altLang="zh-CN">
+                <a:highlight>
+                  <a:srgbClr val="C0C0C0"/>
+                </a:highlight>
+              </a:rPr>
+              <a:t>”</a:t>
+            </a:r>
+            <a:r>
+              <a:rPr lang="zh-CN" altLang="en-US">
+                <a:highlight>
+                  <a:srgbClr val="C0C0C0"/>
+                </a:highlight>
+              </a:rPr>
+              <a:t>我们关心的心理效应？</a:t>
+            </a:r>
+            <a:endParaRPr lang="zh-CN" altLang="en-US"/>
+          </a:p>
+          <a:p>
+            <a:pPr marL="800100" lvl="1" indent="-342900" algn="l">
+              <a:buFont typeface="Arial" panose="020B0604020202020204" pitchFamily="34" charset="0"/>
+              <a:buAutoNum type="arabicPeriod"/>
+            </a:pPr>
+            <a:r>
+              <a:rPr lang="en-US" altLang="zh-CN"/>
+              <a:t>SPE</a:t>
+            </a:r>
+            <a:r>
+              <a:rPr lang="zh-CN" altLang="en-US"/>
+              <a:t>（</a:t>
+            </a:r>
+            <a:r>
+              <a:rPr lang="en-US" altLang="zh-CN"/>
+              <a:t>RT/ACC)</a:t>
+            </a:r>
+            <a:r>
+              <a:rPr lang="zh-CN" altLang="en-US"/>
+              <a:t>【使用</a:t>
+            </a:r>
+            <a:r>
+              <a:rPr lang="en-US" altLang="zh-CN"/>
+              <a:t>Cohens‘d / Self - Other</a:t>
+            </a:r>
+            <a:r>
+              <a:rPr lang="zh-CN" altLang="en-US"/>
+              <a:t>】</a:t>
+            </a:r>
+            <a:endParaRPr lang="zh-CN" altLang="en-US"/>
+          </a:p>
+          <a:p>
+            <a:pPr marL="800100" lvl="1" indent="-342900" algn="l">
+              <a:buFont typeface="Arial" panose="020B0604020202020204" pitchFamily="34" charset="0"/>
+              <a:buAutoNum type="arabicPeriod"/>
+            </a:pPr>
+            <a:r>
+              <a:rPr lang="zh-CN" altLang="en-US"/>
+              <a:t>不同</a:t>
+            </a:r>
+            <a:r>
+              <a:rPr lang="en-US" altLang="zh-CN"/>
+              <a:t> </a:t>
+            </a:r>
+            <a:r>
+              <a:rPr lang="zh-CN" altLang="en-US"/>
+              <a:t>实验设计空间参数</a:t>
+            </a:r>
+            <a:r>
+              <a:rPr lang="zh-CN" altLang="en-US"/>
+              <a:t>组合下效应是否：增强、减弱、消失、反转</a:t>
+            </a:r>
+            <a:endParaRPr lang="zh-CN" altLang="en-US"/>
+          </a:p>
+          <a:p>
+            <a:pPr marL="800100" lvl="1" indent="-342900" algn="l">
+              <a:buFont typeface="Arial" panose="020B0604020202020204" pitchFamily="34" charset="0"/>
+              <a:buAutoNum type="arabicPeriod"/>
+            </a:pPr>
+            <a:endParaRPr lang="zh-CN" altLang="en-US"/>
+          </a:p>
+          <a:p>
+            <a:pPr marL="285750" lvl="0" indent="-285750" algn="l">
+              <a:buFont typeface="Wingdings" panose="05000000000000000000" charset="0"/>
+              <a:buChar char="Ø"/>
+            </a:pPr>
+            <a:r>
+              <a:rPr lang="en-US" altLang="zh-CN"/>
+              <a:t>Layer 3</a:t>
+            </a:r>
+            <a:r>
+              <a:rPr lang="zh-CN" altLang="en-US"/>
+              <a:t>：结构层检验</a:t>
+            </a:r>
+            <a:r>
+              <a:rPr lang="en-US" altLang="zh-CN"/>
+              <a:t>	</a:t>
+            </a:r>
+            <a:r>
+              <a:rPr lang="zh-CN" altLang="en-US">
+                <a:highlight>
+                  <a:srgbClr val="C0C0C0"/>
+                </a:highlight>
+              </a:rPr>
+              <a:t>模型的心理机制是否稳定、可解释、不过拟合？</a:t>
+            </a:r>
+            <a:endParaRPr lang="zh-CN" altLang="en-US">
+              <a:highlight>
+                <a:srgbClr val="C0C0C0"/>
+              </a:highlight>
+            </a:endParaRPr>
+          </a:p>
+          <a:p>
+            <a:pPr marL="800100" lvl="1" indent="-342900" algn="l">
+              <a:buAutoNum type="arabicPeriod"/>
+            </a:pPr>
+            <a:r>
+              <a:rPr lang="zh-CN" altLang="en-US"/>
+              <a:t>参数恢复（</a:t>
+            </a:r>
+            <a:r>
+              <a:rPr lang="en-US" altLang="zh-CN"/>
+              <a:t>parameter recovery</a:t>
+            </a:r>
+            <a:r>
+              <a:rPr lang="zh-CN" altLang="en-US"/>
+              <a:t>）</a:t>
+            </a:r>
+            <a:r>
+              <a:rPr lang="en-US" altLang="zh-CN"/>
+              <a:t> </a:t>
+            </a:r>
+            <a:r>
+              <a:rPr lang="zh-CN" altLang="en-US"/>
+              <a:t>【生成已知参数的数据</a:t>
+            </a:r>
+            <a:r>
+              <a:rPr lang="en-US" altLang="zh-CN"/>
+              <a:t> </a:t>
+            </a:r>
+            <a:r>
+              <a:rPr lang="en-US" altLang="en-US"/>
+              <a:t>→</a:t>
+            </a:r>
+            <a:r>
+              <a:rPr lang="en-US" altLang="zh-CN"/>
+              <a:t> </a:t>
+            </a:r>
+            <a:r>
+              <a:rPr lang="zh-CN" altLang="en-US"/>
+              <a:t>用</a:t>
+            </a:r>
+            <a:r>
+              <a:rPr lang="en-US" altLang="zh-CN"/>
+              <a:t> GP </a:t>
+            </a:r>
+            <a:r>
+              <a:rPr lang="zh-CN" altLang="en-US"/>
+              <a:t>拟合</a:t>
+            </a:r>
+            <a:r>
+              <a:rPr lang="en-US" altLang="zh-CN"/>
+              <a:t> </a:t>
+            </a:r>
+            <a:r>
+              <a:rPr lang="en-US" altLang="en-US"/>
+              <a:t>→</a:t>
+            </a:r>
+            <a:r>
+              <a:rPr lang="en-US" altLang="zh-CN"/>
+              <a:t>DDM</a:t>
+            </a:r>
+            <a:r>
+              <a:rPr lang="zh-CN" altLang="en-US"/>
+              <a:t>参数</a:t>
+            </a:r>
+            <a:r>
+              <a:rPr lang="en-US" altLang="zh-CN"/>
+              <a:t> </a:t>
+            </a:r>
+            <a:r>
+              <a:rPr lang="zh-CN" altLang="en-US"/>
+              <a:t>的映射</a:t>
+            </a:r>
+            <a:r>
+              <a:rPr lang="en-US" altLang="zh-CN"/>
+              <a:t> </a:t>
+            </a:r>
+            <a:r>
+              <a:rPr lang="en-US" altLang="en-US"/>
+              <a:t>→</a:t>
+            </a:r>
+            <a:r>
+              <a:rPr lang="en-US" altLang="zh-CN"/>
+              <a:t> </a:t>
+            </a:r>
+            <a:r>
+              <a:rPr lang="zh-CN" altLang="en-US"/>
+              <a:t>检验恢复能力】</a:t>
+            </a:r>
+            <a:endParaRPr lang="zh-CN" altLang="en-US"/>
+          </a:p>
+          <a:p>
+            <a:pPr marL="800100" lvl="1" indent="-342900" algn="l">
+              <a:buAutoNum type="arabicPeriod"/>
+            </a:pPr>
+            <a:r>
+              <a:rPr lang="zh-CN" altLang="en-US"/>
+              <a:t>噪声鲁棒性（</a:t>
+            </a:r>
+            <a:r>
+              <a:rPr lang="en-US" altLang="zh-CN"/>
+              <a:t>noise robustness</a:t>
+            </a:r>
+            <a:r>
+              <a:rPr lang="zh-CN" altLang="en-US"/>
+              <a:t>）</a:t>
             </a:r>
             <a:endParaRPr lang="en-US" altLang="zh-CN"/>
+          </a:p>
+          <a:p>
+            <a:pPr marL="800100" lvl="1" indent="-342900" algn="l">
+              <a:buAutoNum type="arabicPeriod"/>
+            </a:pPr>
+            <a:r>
+              <a:rPr lang="en-US" altLang="zh-CN"/>
+              <a:t>GP </a:t>
+            </a:r>
+            <a:r>
+              <a:rPr lang="zh-CN" altLang="en-US"/>
+              <a:t>是否只是</a:t>
+            </a:r>
+            <a:r>
+              <a:rPr lang="en-US" altLang="zh-CN"/>
+              <a:t>“</a:t>
+            </a:r>
+            <a:r>
+              <a:rPr lang="zh-CN" altLang="en-US"/>
+              <a:t>插值</a:t>
+            </a:r>
+            <a:r>
+              <a:rPr lang="en-US" altLang="zh-CN"/>
+              <a:t>”</a:t>
+            </a:r>
+            <a:r>
+              <a:rPr lang="zh-CN" altLang="en-US"/>
+              <a:t>，还是有心理意义的不确定性建模</a:t>
+            </a:r>
+            <a:endParaRPr lang="zh-CN" altLang="en-US"/>
+          </a:p>
+          <a:p>
+            <a:pPr marL="285750" indent="-285750" algn="l">
+              <a:buFont typeface="Arial" panose="020B0604020202020204" pitchFamily="34" charset="0"/>
+              <a:buChar char="•"/>
+            </a:pPr>
+            <a:endParaRPr lang="zh-CN" altLang="en-US"/>
+          </a:p>
+          <a:p>
+            <a:r>
+              <a:rPr lang="en-US" altLang="zh-CN"/>
+              <a:t>2.</a:t>
+            </a:r>
+            <a:r>
+              <a:rPr lang="zh-CN" altLang="en-US"/>
+              <a:t>模型与真实数据的差异分析（模型是否能很好的</a:t>
+            </a:r>
+            <a:r>
+              <a:rPr lang="zh-CN" altLang="en-US">
+                <a:solidFill>
+                  <a:srgbClr val="FF0000"/>
+                </a:solidFill>
+              </a:rPr>
+              <a:t>捕捉</a:t>
+            </a:r>
+            <a:r>
+              <a:rPr lang="zh-CN" altLang="en-US"/>
+              <a:t>真实被试的实际反应情况）【模型的解释力与捕捉能力】</a:t>
+            </a:r>
+            <a:endParaRPr lang="zh-CN" altLang="en-US"/>
+          </a:p>
+          <a:p>
+            <a:endParaRPr lang="zh-CN" altLang="en-US"/>
+          </a:p>
+          <a:p>
+            <a:endParaRPr lang="zh-CN" altLang="en-US"/>
           </a:p>
         </p:txBody>
       </p:sp>
@@ -5338,6 +6004,503 @@
         <p:nvPr/>
       </p:nvGrpSpPr>
       <p:grpSpPr/>
+      <p:sp>
+        <p:nvSpPr>
+          <p:cNvPr id="5" name="文本框 4"/>
+          <p:cNvSpPr txBox="1"/>
+          <p:nvPr/>
+        </p:nvSpPr>
+        <p:spPr>
+          <a:xfrm>
+            <a:off x="525780" y="429260"/>
+            <a:ext cx="11115040" cy="5984240"/>
+          </a:xfrm>
+          <a:prstGeom prst="rect">
+            <a:avLst/>
+          </a:prstGeom>
+          <a:noFill/>
+        </p:spPr>
+        <p:txBody>
+          <a:bodyPr wrap="square" rtlCol="0">
+            <a:noAutofit/>
+          </a:bodyPr>
+          <a:p>
+            <a:r>
+              <a:rPr lang="zh-CN" altLang="en-US"/>
+              <a:t>研究具体方法【参考文献篇】</a:t>
+            </a:r>
+            <a:endParaRPr lang="zh-CN" altLang="en-US"/>
+          </a:p>
+          <a:p>
+            <a:pPr algn="ctr"/>
+            <a:r>
+              <a:rPr lang="zh-CN" altLang="en-US">
+                <a:highlight>
+                  <a:srgbClr val="FFFF00"/>
+                </a:highlight>
+                <a:sym typeface="+mn-ea"/>
+              </a:rPr>
+              <a:t>实验设计空间</a:t>
+            </a:r>
+            <a:r>
+              <a:rPr lang="en-US" altLang="zh-CN">
+                <a:highlight>
+                  <a:srgbClr val="FFFF00"/>
+                </a:highlight>
+                <a:sym typeface="+mn-ea"/>
+              </a:rPr>
+              <a:t> Ω </a:t>
+            </a:r>
+            <a:r>
+              <a:rPr lang="en-US" altLang="en-US">
+                <a:highlight>
+                  <a:srgbClr val="FFFF00"/>
+                </a:highlight>
+                <a:sym typeface="+mn-ea"/>
+              </a:rPr>
+              <a:t>→</a:t>
+            </a:r>
+            <a:r>
+              <a:rPr lang="en-US" altLang="zh-CN">
+                <a:highlight>
+                  <a:srgbClr val="FFFF00"/>
+                </a:highlight>
+                <a:sym typeface="+mn-ea"/>
+              </a:rPr>
+              <a:t> </a:t>
+            </a:r>
+            <a:r>
+              <a:rPr lang="zh-CN" altLang="en-US">
+                <a:highlight>
+                  <a:srgbClr val="FFFF00"/>
+                </a:highlight>
+                <a:sym typeface="+mn-ea"/>
+              </a:rPr>
+              <a:t>潜在心理参数（</a:t>
+            </a:r>
+            <a:r>
+              <a:rPr lang="en-US" altLang="zh-CN">
+                <a:highlight>
+                  <a:srgbClr val="FFFF00"/>
+                </a:highlight>
+                <a:sym typeface="+mn-ea"/>
+              </a:rPr>
+              <a:t>DDM</a:t>
+            </a:r>
+            <a:r>
+              <a:rPr lang="zh-CN" altLang="en-US">
+                <a:highlight>
+                  <a:srgbClr val="FFFF00"/>
+                </a:highlight>
+                <a:sym typeface="+mn-ea"/>
+              </a:rPr>
+              <a:t>）</a:t>
+            </a:r>
+            <a:r>
+              <a:rPr lang="en-US" altLang="zh-CN">
+                <a:highlight>
+                  <a:srgbClr val="FFFF00"/>
+                </a:highlight>
+                <a:sym typeface="+mn-ea"/>
+              </a:rPr>
+              <a:t> </a:t>
+            </a:r>
+            <a:r>
+              <a:rPr lang="en-US" altLang="en-US">
+                <a:highlight>
+                  <a:srgbClr val="FFFF00"/>
+                </a:highlight>
+                <a:sym typeface="+mn-ea"/>
+              </a:rPr>
+              <a:t>→</a:t>
+            </a:r>
+            <a:r>
+              <a:rPr lang="en-US" altLang="zh-CN">
+                <a:highlight>
+                  <a:srgbClr val="FFFF00"/>
+                </a:highlight>
+                <a:sym typeface="+mn-ea"/>
+              </a:rPr>
+              <a:t> </a:t>
+            </a:r>
+            <a:r>
+              <a:rPr lang="zh-CN" altLang="en-US">
+                <a:highlight>
+                  <a:srgbClr val="FFFF00"/>
+                </a:highlight>
+                <a:sym typeface="+mn-ea"/>
+              </a:rPr>
+              <a:t>行为数据（</a:t>
+            </a:r>
+            <a:r>
+              <a:rPr lang="en-US" altLang="zh-CN">
+                <a:highlight>
+                  <a:srgbClr val="FFFF00"/>
+                </a:highlight>
+                <a:sym typeface="+mn-ea"/>
+              </a:rPr>
+              <a:t>RT, ACC</a:t>
+            </a:r>
+            <a:r>
+              <a:rPr lang="zh-CN" altLang="en-US">
+                <a:highlight>
+                  <a:srgbClr val="FFFF00"/>
+                </a:highlight>
+                <a:sym typeface="+mn-ea"/>
+              </a:rPr>
+              <a:t>）</a:t>
+            </a:r>
+            <a:endParaRPr lang="zh-CN" altLang="en-US"/>
+          </a:p>
+          <a:p>
+            <a:r>
+              <a:rPr lang="zh-CN" altLang="en-US"/>
+              <a:t>一、生成模型的检验【</a:t>
+            </a:r>
+            <a:r>
+              <a:rPr lang="en-US" altLang="zh-CN"/>
+              <a:t>model checking</a:t>
+            </a:r>
+            <a:r>
+              <a:rPr lang="zh-CN" altLang="en-US"/>
+              <a:t>】</a:t>
+            </a:r>
+            <a:r>
+              <a:rPr lang="en-US" altLang="zh-CN"/>
+              <a:t>  </a:t>
+            </a:r>
+            <a:r>
+              <a:rPr lang="zh-CN" altLang="en-US">
+                <a:gradFill>
+                  <a:gsLst>
+                    <a:gs pos="50000">
+                      <a:schemeClr val="accent2"/>
+                    </a:gs>
+                    <a:gs pos="0">
+                      <a:schemeClr val="accent2">
+                        <a:lumMod val="25000"/>
+                        <a:lumOff val="75000"/>
+                      </a:schemeClr>
+                    </a:gs>
+                    <a:gs pos="100000">
+                      <a:schemeClr val="accent2">
+                        <a:lumMod val="85000"/>
+                      </a:schemeClr>
+                    </a:gs>
+                  </a:gsLst>
+                  <a:lin ang="5400000" scaled="1"/>
+                </a:gradFill>
+                <a:sym typeface="+mn-ea"/>
+              </a:rPr>
+              <a:t>模型在多层级、多统计量、多不确定性条件下，是否能生成</a:t>
+            </a:r>
+            <a:r>
+              <a:rPr lang="en-US" altLang="zh-CN">
+                <a:gradFill>
+                  <a:gsLst>
+                    <a:gs pos="50000">
+                      <a:schemeClr val="accent2"/>
+                    </a:gs>
+                    <a:gs pos="0">
+                      <a:schemeClr val="accent2">
+                        <a:lumMod val="25000"/>
+                        <a:lumOff val="75000"/>
+                      </a:schemeClr>
+                    </a:gs>
+                    <a:gs pos="100000">
+                      <a:schemeClr val="accent2">
+                        <a:lumMod val="85000"/>
+                      </a:schemeClr>
+                    </a:gs>
+                  </a:gsLst>
+                  <a:lin ang="5400000" scaled="1"/>
+                </a:gradFill>
+                <a:sym typeface="+mn-ea"/>
+              </a:rPr>
+              <a:t>“</a:t>
+            </a:r>
+            <a:r>
+              <a:rPr lang="zh-CN" altLang="en-US">
+                <a:gradFill>
+                  <a:gsLst>
+                    <a:gs pos="50000">
+                      <a:schemeClr val="accent2"/>
+                    </a:gs>
+                    <a:gs pos="0">
+                      <a:schemeClr val="accent2">
+                        <a:lumMod val="25000"/>
+                        <a:lumOff val="75000"/>
+                      </a:schemeClr>
+                    </a:gs>
+                    <a:gs pos="100000">
+                      <a:schemeClr val="accent2">
+                        <a:lumMod val="85000"/>
+                      </a:schemeClr>
+                    </a:gs>
+                  </a:gsLst>
+                  <a:lin ang="5400000" scaled="1"/>
+                </a:gradFill>
+                <a:sym typeface="+mn-ea"/>
+              </a:rPr>
+              <a:t>看起来像人类</a:t>
+            </a:r>
+            <a:r>
+              <a:rPr lang="en-US" altLang="zh-CN">
+                <a:gradFill>
+                  <a:gsLst>
+                    <a:gs pos="50000">
+                      <a:schemeClr val="accent2"/>
+                    </a:gs>
+                    <a:gs pos="0">
+                      <a:schemeClr val="accent2">
+                        <a:lumMod val="25000"/>
+                        <a:lumOff val="75000"/>
+                      </a:schemeClr>
+                    </a:gs>
+                    <a:gs pos="100000">
+                      <a:schemeClr val="accent2">
+                        <a:lumMod val="85000"/>
+                      </a:schemeClr>
+                    </a:gs>
+                  </a:gsLst>
+                  <a:lin ang="5400000" scaled="1"/>
+                </a:gradFill>
+                <a:sym typeface="+mn-ea"/>
+              </a:rPr>
+              <a:t>”</a:t>
+            </a:r>
+            <a:r>
+              <a:rPr lang="zh-CN" altLang="en-US">
+                <a:gradFill>
+                  <a:gsLst>
+                    <a:gs pos="50000">
+                      <a:schemeClr val="accent2"/>
+                    </a:gs>
+                    <a:gs pos="0">
+                      <a:schemeClr val="accent2">
+                        <a:lumMod val="25000"/>
+                        <a:lumOff val="75000"/>
+                      </a:schemeClr>
+                    </a:gs>
+                    <a:gs pos="100000">
+                      <a:schemeClr val="accent2">
+                        <a:lumMod val="85000"/>
+                      </a:schemeClr>
+                    </a:gs>
+                  </a:gsLst>
+                  <a:lin ang="5400000" scaled="1"/>
+                </a:gradFill>
+                <a:sym typeface="+mn-ea"/>
+              </a:rPr>
+              <a:t>的数据</a:t>
+            </a:r>
+            <a:endParaRPr lang="zh-CN" altLang="en-US">
+              <a:gradFill>
+                <a:gsLst>
+                  <a:gs pos="50000">
+                    <a:schemeClr val="accent2"/>
+                  </a:gs>
+                  <a:gs pos="0">
+                    <a:schemeClr val="accent2">
+                      <a:lumMod val="25000"/>
+                      <a:lumOff val="75000"/>
+                    </a:schemeClr>
+                  </a:gs>
+                  <a:gs pos="100000">
+                    <a:schemeClr val="accent2">
+                      <a:lumMod val="85000"/>
+                    </a:schemeClr>
+                  </a:gs>
+                </a:gsLst>
+                <a:lin ang="5400000" scaled="1"/>
+              </a:gradFill>
+            </a:endParaRPr>
+          </a:p>
+          <a:p>
+            <a:endParaRPr lang="zh-CN" altLang="en-US"/>
+          </a:p>
+          <a:p>
+            <a:r>
+              <a:rPr lang="en-US" altLang="zh-CN"/>
+              <a:t>1.</a:t>
+            </a:r>
+            <a:r>
+              <a:rPr lang="zh-CN" altLang="en-US"/>
+              <a:t>模型的有效性分析（模型是否能按照</a:t>
+            </a:r>
+            <a:r>
+              <a:rPr lang="zh-CN" altLang="en-US">
+                <a:solidFill>
+                  <a:srgbClr val="FF0000"/>
+                </a:solidFill>
+              </a:rPr>
+              <a:t>预期</a:t>
+            </a:r>
+            <a:r>
+              <a:rPr lang="zh-CN" altLang="en-US"/>
+              <a:t>生成数据）【检查模型生成是否按照我们预想进行】</a:t>
+            </a:r>
+            <a:r>
+              <a:rPr lang="en-US" altLang="zh-CN"/>
+              <a:t> </a:t>
+            </a:r>
+            <a:r>
+              <a:rPr lang="zh-CN" altLang="en-US"/>
+              <a:t>参考文献</a:t>
+            </a:r>
+            <a:endParaRPr lang="zh-CN" altLang="en-US"/>
+          </a:p>
+          <a:p>
+            <a:pPr algn="ctr"/>
+            <a:endParaRPr lang="zh-CN" altLang="en-US">
+              <a:highlight>
+                <a:srgbClr val="C0C0C0"/>
+              </a:highlight>
+            </a:endParaRPr>
+          </a:p>
+          <a:p>
+            <a:pPr marL="285750" indent="-285750" algn="l">
+              <a:buFont typeface="Wingdings" panose="05000000000000000000" charset="0"/>
+              <a:buChar char="Ø"/>
+            </a:pPr>
+            <a:r>
+              <a:rPr lang="zh-CN" altLang="en-US"/>
+              <a:t>第一类：</a:t>
+            </a:r>
+            <a:r>
+              <a:rPr lang="en-US" altLang="zh-CN"/>
+              <a:t>Posterior / Prior Predictive Checks</a:t>
+            </a:r>
+            <a:r>
+              <a:rPr lang="zh-CN" altLang="en-US"/>
+              <a:t>（分布一致性）</a:t>
+            </a:r>
+            <a:endParaRPr lang="zh-CN" altLang="en-US"/>
+          </a:p>
+          <a:p>
+            <a:pPr indent="457200" algn="ctr">
+              <a:buNone/>
+            </a:pPr>
+            <a:r>
+              <a:rPr lang="zh-CN" altLang="en-US">
+                <a:highlight>
+                  <a:srgbClr val="C0C0C0"/>
+                </a:highlight>
+              </a:rPr>
+              <a:t>这个模型，是否能生成在统计分布层面</a:t>
+            </a:r>
+            <a:r>
+              <a:rPr lang="en-US" altLang="zh-CN">
+                <a:highlight>
+                  <a:srgbClr val="C0C0C0"/>
+                </a:highlight>
+              </a:rPr>
+              <a:t>“</a:t>
+            </a:r>
+            <a:r>
+              <a:rPr lang="zh-CN" altLang="en-US">
+                <a:highlight>
+                  <a:srgbClr val="C0C0C0"/>
+                </a:highlight>
+              </a:rPr>
+              <a:t>看起来像真实数据</a:t>
+            </a:r>
+            <a:r>
+              <a:rPr lang="en-US" altLang="zh-CN">
+                <a:highlight>
+                  <a:srgbClr val="C0C0C0"/>
+                </a:highlight>
+              </a:rPr>
+              <a:t>”</a:t>
+            </a:r>
+            <a:r>
+              <a:rPr lang="zh-CN" altLang="en-US">
+                <a:highlight>
+                  <a:srgbClr val="C0C0C0"/>
+                </a:highlight>
+              </a:rPr>
+              <a:t>的数据？</a:t>
+            </a:r>
+            <a:r>
+              <a:rPr lang="en-US" altLang="zh-CN">
+                <a:highlight>
+                  <a:srgbClr val="C0C0C0"/>
+                </a:highlight>
+              </a:rPr>
+              <a:t>	</a:t>
+            </a:r>
+            <a:endParaRPr lang="zh-CN" altLang="en-US">
+              <a:highlight>
+                <a:srgbClr val="C0C0C0"/>
+              </a:highlight>
+            </a:endParaRPr>
+          </a:p>
+          <a:p>
+            <a:pPr marL="800100" lvl="1" indent="-342900" algn="l">
+              <a:buAutoNum type="arabicPeriod"/>
+            </a:pPr>
+            <a:r>
+              <a:rPr lang="en-US" altLang="zh-CN"/>
+              <a:t>Gelman, A., Carlin, J. B., Stern, H. S., Dunson, D. B., Vehtari, A., &amp; Rubin, D. B. (2013).Bayesian data analysis (3rd ed.). Boca Raton, FL: CRC Press.</a:t>
+            </a:r>
+            <a:endParaRPr lang="en-US" altLang="zh-CN"/>
+          </a:p>
+          <a:p>
+            <a:pPr marL="800100" lvl="1" indent="-342900" algn="l">
+              <a:buAutoNum type="arabicPeriod"/>
+            </a:pPr>
+            <a:r>
+              <a:rPr lang="en-US" altLang="zh-CN"/>
+              <a:t>Gelman, A., Vehtari, A., Simpson, D., Margossian, C. C., Carpenter, B., Yao, Y., … Modr</a:t>
+            </a:r>
+            <a:r>
+              <a:rPr lang="en-US" altLang="en-US"/>
+              <a:t>á</a:t>
+            </a:r>
+            <a:r>
+              <a:rPr lang="en-US" altLang="zh-CN"/>
+              <a:t>k, M. (2020).Bayesian workflow. arXiv preprint arXiv:2011.01808.</a:t>
+            </a:r>
+            <a:endParaRPr lang="en-US" altLang="zh-CN"/>
+          </a:p>
+          <a:p>
+            <a:pPr marL="800100" lvl="1" indent="-342900" algn="l">
+              <a:buAutoNum type="arabicPeriod"/>
+            </a:pPr>
+            <a:r>
+              <a:rPr lang="en-US" altLang="zh-CN"/>
+              <a:t>Brown, S. D., &amp; Heathcote, A. (2008).The simplest complete model of choice response time: Linear ballistic accumulation.Cognitive Psychology, 57(3), 153–178. https://doi.org/10.1016/j.cogpsych.2007.12.002</a:t>
+            </a:r>
+            <a:endParaRPr lang="en-US" altLang="zh-CN"/>
+          </a:p>
+          <a:p>
+            <a:pPr marL="800100" lvl="1" indent="-342900" algn="l">
+              <a:buAutoNum type="arabicPeriod"/>
+            </a:pPr>
+            <a:r>
+              <a:rPr lang="en-US" altLang="zh-CN"/>
+              <a:t>Lee, M. D., &amp; Wagenmakers, E.-J. (2013).Bayesian cognitive modeling: A practical course. Cambridge: Cambridge University Press.</a:t>
+            </a:r>
+            <a:endParaRPr lang="en-US" altLang="zh-CN"/>
+          </a:p>
+          <a:p>
+            <a:pPr marL="800100" lvl="1" indent="-342900" algn="l">
+              <a:buAutoNum type="arabicPeriod"/>
+            </a:pPr>
+            <a:r>
+              <a:rPr lang="en-US" altLang="zh-CN"/>
+              <a:t>Haines, N., Kvam, P. D., Irving, L., Smith, C. T., Beauchaine, T. P., Pitt, M. A., Ahn, W.-Y., &amp; Turner, B. M. (2024). A tutorial on using generative models to advance psychological science: Lessons from the reliability paradox. Psychological Methods. https://doi.org/10.31234/osf.io/xr7y3</a:t>
+            </a:r>
+            <a:endParaRPr lang="en-US" altLang="zh-CN"/>
+          </a:p>
+          <a:p>
+            <a:endParaRPr lang="zh-CN" altLang="en-US"/>
+          </a:p>
+          <a:p>
+            <a:endParaRPr lang="zh-CN" altLang="en-US"/>
+          </a:p>
+        </p:txBody>
+      </p:sp>
     </p:spTree>
   </p:cSld>
   <p:clrMapOvr>
@@ -5379,7 +6542,17 @@
           <a:p>
             <a:r>
               <a:rPr lang="zh-CN" altLang="en-US"/>
-              <a:t>研究具体方法【思路篇】</a:t>
+              <a:t>研究具体方法【</a:t>
+            </a:r>
+            <a:r>
+              <a:rPr lang="zh-CN" altLang="en-US">
+                <a:sym typeface="+mn-ea"/>
+              </a:rPr>
+              <a:t>参考文献篇</a:t>
+            </a:r>
+            <a:r>
+              <a:rPr lang="zh-CN" altLang="en-US"/>
+              <a:t>】</a:t>
             </a:r>
             <a:endParaRPr lang="zh-CN" altLang="en-US"/>
           </a:p>
@@ -5674,11 +6847,11 @@
           <a:p>
             <a:r>
               <a:rPr lang="en-US" altLang="zh-CN"/>
-              <a:t>2.</a:t>
-            </a:r>
-            <a:r>
-              <a:rPr lang="zh-CN" altLang="en-US"/>
-              <a:t>模型与真实数据的差异分析（模型是否能很好的</a:t>
+              <a:t>1.</a:t>
+            </a:r>
+            <a:r>
+              <a:rPr lang="zh-CN" altLang="en-US"/>
+              <a:t>模型的有效性分析（模型是否能按照</a:t>
             </a:r>
             <a:r>
               <a:rPr lang="zh-CN" altLang="en-US">
@@ -5686,19 +6859,682 @@
                   <a:srgbClr val="FF0000"/>
                 </a:solidFill>
               </a:rPr>
-              <a:t>捕捉</a:t>
-            </a:r>
-            <a:r>
-              <a:rPr lang="zh-CN" altLang="en-US"/>
-              <a:t>真实被试的实际反应情况）【模型的解释力与捕捉能力】</a:t>
-            </a:r>
-            <a:endParaRPr lang="zh-CN" altLang="en-US"/>
-          </a:p>
-          <a:p>
-            <a:endParaRPr lang="zh-CN" altLang="en-US"/>
-          </a:p>
-          <a:p>
-            <a:endParaRPr lang="zh-CN" altLang="en-US"/>
+              <a:t>预期</a:t>
+            </a:r>
+            <a:r>
+              <a:rPr lang="zh-CN" altLang="en-US"/>
+              <a:t>生成数据）【检查模型生成是否按照我们预想进行】</a:t>
+            </a:r>
+            <a:r>
+              <a:rPr lang="en-US" altLang="zh-CN"/>
+              <a:t> </a:t>
+            </a:r>
+            <a:r>
+              <a:rPr lang="zh-CN" altLang="en-US"/>
+              <a:t>参考文献</a:t>
+            </a:r>
+            <a:endParaRPr lang="zh-CN" altLang="en-US"/>
+          </a:p>
+          <a:p>
+            <a:pPr algn="ctr"/>
+            <a:endParaRPr lang="zh-CN" altLang="en-US">
+              <a:highlight>
+                <a:srgbClr val="C0C0C0"/>
+              </a:highlight>
+            </a:endParaRPr>
+          </a:p>
+          <a:p>
+            <a:pPr marL="285750" indent="-285750" algn="l">
+              <a:buFont typeface="Wingdings" panose="05000000000000000000" charset="0"/>
+              <a:buChar char="Ø"/>
+            </a:pPr>
+            <a:r>
+              <a:rPr lang="zh-CN" altLang="en-US"/>
+              <a:t>第二类：</a:t>
+            </a:r>
+            <a:r>
+              <a:rPr lang="en-US" altLang="zh-CN"/>
+              <a:t>Effect-level checks</a:t>
+            </a:r>
+            <a:r>
+              <a:rPr lang="zh-CN" altLang="en-US"/>
+              <a:t>（心理效应是否自然涌现）</a:t>
+            </a:r>
+            <a:endParaRPr lang="zh-CN" altLang="en-US"/>
+          </a:p>
+          <a:p>
+            <a:pPr indent="457200" algn="ctr">
+              <a:buNone/>
+            </a:pPr>
+            <a:r>
+              <a:rPr lang="zh-CN" altLang="en-US">
+                <a:highlight>
+                  <a:srgbClr val="C0C0C0"/>
+                </a:highlight>
+              </a:rPr>
+              <a:t>模型是否在</a:t>
+            </a:r>
+            <a:r>
+              <a:rPr lang="en-US" altLang="zh-CN">
+                <a:highlight>
+                  <a:srgbClr val="C0C0C0"/>
+                </a:highlight>
+              </a:rPr>
+              <a:t>“</a:t>
+            </a:r>
+            <a:r>
+              <a:rPr lang="zh-CN" altLang="en-US">
+                <a:highlight>
+                  <a:srgbClr val="C0C0C0"/>
+                </a:highlight>
+              </a:rPr>
+              <a:t>没有强行编码</a:t>
+            </a:r>
+            <a:r>
+              <a:rPr lang="en-US" altLang="zh-CN">
+                <a:highlight>
+                  <a:srgbClr val="C0C0C0"/>
+                </a:highlight>
+              </a:rPr>
+              <a:t>”</a:t>
+            </a:r>
+            <a:r>
+              <a:rPr lang="zh-CN" altLang="en-US">
+                <a:highlight>
+                  <a:srgbClr val="C0C0C0"/>
+                </a:highlight>
+              </a:rPr>
+              <a:t>的情况下，仍然能生成目标心理效应？</a:t>
+            </a:r>
+            <a:r>
+              <a:rPr lang="en-US" altLang="zh-CN">
+                <a:highlight>
+                  <a:srgbClr val="C0C0C0"/>
+                </a:highlight>
+              </a:rPr>
+              <a:t>	</a:t>
+            </a:r>
+            <a:endParaRPr lang="zh-CN" altLang="en-US">
+              <a:highlight>
+                <a:srgbClr val="C0C0C0"/>
+              </a:highlight>
+            </a:endParaRPr>
+          </a:p>
+          <a:p>
+            <a:pPr marL="800100" lvl="1" indent="-342900" algn="l">
+              <a:buAutoNum type="arabicPeriod"/>
+            </a:pPr>
+            <a:r>
+              <a:rPr lang="en-US" altLang="zh-CN"/>
+              <a:t>Scheel, A. M., Schijen, M. R. J., &amp; Lakens, D. (2021).An excess of positive results: Comparing the standard psychology literature with registered reports.Advances in Methods and Practices in Psychological Science, 4(2), 1–12.https://doi.org/10.1177/25152459211007467</a:t>
+            </a:r>
+            <a:endParaRPr lang="en-US" altLang="zh-CN"/>
+          </a:p>
+          <a:p>
+            <a:pPr marL="800100" lvl="1" indent="-342900" algn="l">
+              <a:buAutoNum type="arabicPeriod"/>
+            </a:pPr>
+            <a:r>
+              <a:rPr lang="en-US" altLang="zh-CN"/>
+              <a:t>Oberauer, K., &amp; Lewandowsky, S. (2019).Addressing the theory crisis in psychology.Psychonomic Bulletin &amp; Review, 26(5), 1596–1618.https://doi.org/10.3758/s13423-019-01645-2</a:t>
+            </a:r>
+            <a:endParaRPr lang="en-US" altLang="zh-CN"/>
+          </a:p>
+          <a:p>
+            <a:pPr marL="800100" lvl="1" indent="-342900" algn="l">
+              <a:buAutoNum type="arabicPeriod"/>
+            </a:pPr>
+            <a:r>
+              <a:rPr lang="en-US" altLang="zh-CN"/>
+              <a:t>Sui, J., He, X., &amp; Humphreys, G. W. (2012).Perceptual effects of social salience: Evidence from self-prioritization effects on perceptual matching.Journal of Experimental Psychology: Human Perception and Performance, 38(5), 1105–1117.https://doi.org/10.1037/a0029792</a:t>
+            </a:r>
+            <a:endParaRPr lang="en-US" altLang="zh-CN"/>
+          </a:p>
+          <a:p>
+            <a:endParaRPr lang="zh-CN" altLang="en-US"/>
+          </a:p>
+        </p:txBody>
+      </p:sp>
+    </p:spTree>
+  </p:cSld>
+  <p:clrMapOvr>
+    <a:masterClrMapping/>
+  </p:clrMapOvr>
+</p:sld>
+</file>
+
+<file path=ppt/slides/slide9.xml><?xml version="1.0" encoding="utf-8"?>
+<p:sld xmlns:a="http://schemas.openxmlformats.org/drawingml/2006/main" xmlns:r="http://schemas.openxmlformats.org/officeDocument/2006/relationships" xmlns:p="http://schemas.openxmlformats.org/presentationml/2006/main">
+  <p:cSld>
+    <p:spTree>
+      <p:nvGrpSpPr>
+        <p:cNvPr id="1" name=""/>
+        <p:cNvGrpSpPr/>
+        <p:nvPr/>
+      </p:nvGrpSpPr>
+      <p:grpSpPr/>
+      <p:sp>
+        <p:nvSpPr>
+          <p:cNvPr id="5" name="文本框 4"/>
+          <p:cNvSpPr txBox="1"/>
+          <p:nvPr/>
+        </p:nvSpPr>
+        <p:spPr>
+          <a:xfrm>
+            <a:off x="525780" y="429260"/>
+            <a:ext cx="11115040" cy="5984240"/>
+          </a:xfrm>
+          <a:prstGeom prst="rect">
+            <a:avLst/>
+          </a:prstGeom>
+          <a:noFill/>
+        </p:spPr>
+        <p:txBody>
+          <a:bodyPr wrap="square" rtlCol="0">
+            <a:noAutofit/>
+          </a:bodyPr>
+          <a:p>
+            <a:r>
+              <a:rPr lang="zh-CN" altLang="en-US"/>
+              <a:t>研究具体方法【</a:t>
+            </a:r>
+            <a:r>
+              <a:rPr lang="zh-CN" altLang="en-US">
+                <a:sym typeface="+mn-ea"/>
+              </a:rPr>
+              <a:t>参考文献篇</a:t>
+            </a:r>
+            <a:r>
+              <a:rPr lang="zh-CN" altLang="en-US"/>
+              <a:t>】</a:t>
+            </a:r>
+            <a:endParaRPr lang="zh-CN" altLang="en-US"/>
+          </a:p>
+          <a:p>
+            <a:pPr algn="ctr"/>
+            <a:r>
+              <a:rPr lang="zh-CN" altLang="en-US">
+                <a:highlight>
+                  <a:srgbClr val="FFFF00"/>
+                </a:highlight>
+                <a:sym typeface="+mn-ea"/>
+              </a:rPr>
+              <a:t>实验设计空间</a:t>
+            </a:r>
+            <a:r>
+              <a:rPr lang="en-US" altLang="zh-CN">
+                <a:highlight>
+                  <a:srgbClr val="FFFF00"/>
+                </a:highlight>
+                <a:sym typeface="+mn-ea"/>
+              </a:rPr>
+              <a:t> Ω </a:t>
+            </a:r>
+            <a:r>
+              <a:rPr lang="en-US" altLang="en-US">
+                <a:highlight>
+                  <a:srgbClr val="FFFF00"/>
+                </a:highlight>
+                <a:sym typeface="+mn-ea"/>
+              </a:rPr>
+              <a:t>→</a:t>
+            </a:r>
+            <a:r>
+              <a:rPr lang="en-US" altLang="zh-CN">
+                <a:highlight>
+                  <a:srgbClr val="FFFF00"/>
+                </a:highlight>
+                <a:sym typeface="+mn-ea"/>
+              </a:rPr>
+              <a:t> </a:t>
+            </a:r>
+            <a:r>
+              <a:rPr lang="zh-CN" altLang="en-US">
+                <a:highlight>
+                  <a:srgbClr val="FFFF00"/>
+                </a:highlight>
+                <a:sym typeface="+mn-ea"/>
+              </a:rPr>
+              <a:t>潜在心理参数（</a:t>
+            </a:r>
+            <a:r>
+              <a:rPr lang="en-US" altLang="zh-CN">
+                <a:highlight>
+                  <a:srgbClr val="FFFF00"/>
+                </a:highlight>
+                <a:sym typeface="+mn-ea"/>
+              </a:rPr>
+              <a:t>DDM</a:t>
+            </a:r>
+            <a:r>
+              <a:rPr lang="zh-CN" altLang="en-US">
+                <a:highlight>
+                  <a:srgbClr val="FFFF00"/>
+                </a:highlight>
+                <a:sym typeface="+mn-ea"/>
+              </a:rPr>
+              <a:t>）</a:t>
+            </a:r>
+            <a:r>
+              <a:rPr lang="en-US" altLang="zh-CN">
+                <a:highlight>
+                  <a:srgbClr val="FFFF00"/>
+                </a:highlight>
+                <a:sym typeface="+mn-ea"/>
+              </a:rPr>
+              <a:t> </a:t>
+            </a:r>
+            <a:r>
+              <a:rPr lang="en-US" altLang="en-US">
+                <a:highlight>
+                  <a:srgbClr val="FFFF00"/>
+                </a:highlight>
+                <a:sym typeface="+mn-ea"/>
+              </a:rPr>
+              <a:t>→</a:t>
+            </a:r>
+            <a:r>
+              <a:rPr lang="en-US" altLang="zh-CN">
+                <a:highlight>
+                  <a:srgbClr val="FFFF00"/>
+                </a:highlight>
+                <a:sym typeface="+mn-ea"/>
+              </a:rPr>
+              <a:t> </a:t>
+            </a:r>
+            <a:r>
+              <a:rPr lang="zh-CN" altLang="en-US">
+                <a:highlight>
+                  <a:srgbClr val="FFFF00"/>
+                </a:highlight>
+                <a:sym typeface="+mn-ea"/>
+              </a:rPr>
+              <a:t>行为数据（</a:t>
+            </a:r>
+            <a:r>
+              <a:rPr lang="en-US" altLang="zh-CN">
+                <a:highlight>
+                  <a:srgbClr val="FFFF00"/>
+                </a:highlight>
+                <a:sym typeface="+mn-ea"/>
+              </a:rPr>
+              <a:t>RT, ACC</a:t>
+            </a:r>
+            <a:r>
+              <a:rPr lang="zh-CN" altLang="en-US">
+                <a:highlight>
+                  <a:srgbClr val="FFFF00"/>
+                </a:highlight>
+                <a:sym typeface="+mn-ea"/>
+              </a:rPr>
+              <a:t>）</a:t>
+            </a:r>
+            <a:endParaRPr lang="zh-CN" altLang="en-US"/>
+          </a:p>
+          <a:p>
+            <a:r>
+              <a:rPr lang="zh-CN" altLang="en-US"/>
+              <a:t>一、生成模型的检验【</a:t>
+            </a:r>
+            <a:r>
+              <a:rPr lang="en-US" altLang="zh-CN"/>
+              <a:t>model checking</a:t>
+            </a:r>
+            <a:r>
+              <a:rPr lang="zh-CN" altLang="en-US"/>
+              <a:t>】</a:t>
+            </a:r>
+            <a:r>
+              <a:rPr lang="en-US" altLang="zh-CN"/>
+              <a:t>  </a:t>
+            </a:r>
+            <a:r>
+              <a:rPr lang="zh-CN" altLang="en-US">
+                <a:gradFill>
+                  <a:gsLst>
+                    <a:gs pos="50000">
+                      <a:schemeClr val="accent2"/>
+                    </a:gs>
+                    <a:gs pos="0">
+                      <a:schemeClr val="accent2">
+                        <a:lumMod val="25000"/>
+                        <a:lumOff val="75000"/>
+                      </a:schemeClr>
+                    </a:gs>
+                    <a:gs pos="100000">
+                      <a:schemeClr val="accent2">
+                        <a:lumMod val="85000"/>
+                      </a:schemeClr>
+                    </a:gs>
+                  </a:gsLst>
+                  <a:lin ang="5400000" scaled="1"/>
+                </a:gradFill>
+                <a:sym typeface="+mn-ea"/>
+              </a:rPr>
+              <a:t>模型在多层级、多统计量、多不确定性条件下，是否能生成</a:t>
+            </a:r>
+            <a:r>
+              <a:rPr lang="en-US" altLang="zh-CN">
+                <a:gradFill>
+                  <a:gsLst>
+                    <a:gs pos="50000">
+                      <a:schemeClr val="accent2"/>
+                    </a:gs>
+                    <a:gs pos="0">
+                      <a:schemeClr val="accent2">
+                        <a:lumMod val="25000"/>
+                        <a:lumOff val="75000"/>
+                      </a:schemeClr>
+                    </a:gs>
+                    <a:gs pos="100000">
+                      <a:schemeClr val="accent2">
+                        <a:lumMod val="85000"/>
+                      </a:schemeClr>
+                    </a:gs>
+                  </a:gsLst>
+                  <a:lin ang="5400000" scaled="1"/>
+                </a:gradFill>
+                <a:sym typeface="+mn-ea"/>
+              </a:rPr>
+              <a:t>“</a:t>
+            </a:r>
+            <a:r>
+              <a:rPr lang="zh-CN" altLang="en-US">
+                <a:gradFill>
+                  <a:gsLst>
+                    <a:gs pos="50000">
+                      <a:schemeClr val="accent2"/>
+                    </a:gs>
+                    <a:gs pos="0">
+                      <a:schemeClr val="accent2">
+                        <a:lumMod val="25000"/>
+                        <a:lumOff val="75000"/>
+                      </a:schemeClr>
+                    </a:gs>
+                    <a:gs pos="100000">
+                      <a:schemeClr val="accent2">
+                        <a:lumMod val="85000"/>
+                      </a:schemeClr>
+                    </a:gs>
+                  </a:gsLst>
+                  <a:lin ang="5400000" scaled="1"/>
+                </a:gradFill>
+                <a:sym typeface="+mn-ea"/>
+              </a:rPr>
+              <a:t>看起来像人类</a:t>
+            </a:r>
+            <a:r>
+              <a:rPr lang="en-US" altLang="zh-CN">
+                <a:gradFill>
+                  <a:gsLst>
+                    <a:gs pos="50000">
+                      <a:schemeClr val="accent2"/>
+                    </a:gs>
+                    <a:gs pos="0">
+                      <a:schemeClr val="accent2">
+                        <a:lumMod val="25000"/>
+                        <a:lumOff val="75000"/>
+                      </a:schemeClr>
+                    </a:gs>
+                    <a:gs pos="100000">
+                      <a:schemeClr val="accent2">
+                        <a:lumMod val="85000"/>
+                      </a:schemeClr>
+                    </a:gs>
+                  </a:gsLst>
+                  <a:lin ang="5400000" scaled="1"/>
+                </a:gradFill>
+                <a:sym typeface="+mn-ea"/>
+              </a:rPr>
+              <a:t>”</a:t>
+            </a:r>
+            <a:r>
+              <a:rPr lang="zh-CN" altLang="en-US">
+                <a:gradFill>
+                  <a:gsLst>
+                    <a:gs pos="50000">
+                      <a:schemeClr val="accent2"/>
+                    </a:gs>
+                    <a:gs pos="0">
+                      <a:schemeClr val="accent2">
+                        <a:lumMod val="25000"/>
+                        <a:lumOff val="75000"/>
+                      </a:schemeClr>
+                    </a:gs>
+                    <a:gs pos="100000">
+                      <a:schemeClr val="accent2">
+                        <a:lumMod val="85000"/>
+                      </a:schemeClr>
+                    </a:gs>
+                  </a:gsLst>
+                  <a:lin ang="5400000" scaled="1"/>
+                </a:gradFill>
+                <a:sym typeface="+mn-ea"/>
+              </a:rPr>
+              <a:t>的数据</a:t>
+            </a:r>
+            <a:endParaRPr lang="zh-CN" altLang="en-US">
+              <a:gradFill>
+                <a:gsLst>
+                  <a:gs pos="50000">
+                    <a:schemeClr val="accent2"/>
+                  </a:gs>
+                  <a:gs pos="0">
+                    <a:schemeClr val="accent2">
+                      <a:lumMod val="25000"/>
+                      <a:lumOff val="75000"/>
+                    </a:schemeClr>
+                  </a:gs>
+                  <a:gs pos="100000">
+                    <a:schemeClr val="accent2">
+                      <a:lumMod val="85000"/>
+                    </a:schemeClr>
+                  </a:gs>
+                </a:gsLst>
+                <a:lin ang="5400000" scaled="1"/>
+              </a:gradFill>
+            </a:endParaRPr>
+          </a:p>
+          <a:p>
+            <a:endParaRPr lang="zh-CN" altLang="en-US"/>
+          </a:p>
+          <a:p>
+            <a:r>
+              <a:rPr lang="en-US" altLang="zh-CN"/>
+              <a:t>1.</a:t>
+            </a:r>
+            <a:r>
+              <a:rPr lang="zh-CN" altLang="en-US"/>
+              <a:t>模型的有效性分析（模型是否能按照</a:t>
+            </a:r>
+            <a:r>
+              <a:rPr lang="zh-CN" altLang="en-US">
+                <a:solidFill>
+                  <a:srgbClr val="FF0000"/>
+                </a:solidFill>
+              </a:rPr>
+              <a:t>预期</a:t>
+            </a:r>
+            <a:r>
+              <a:rPr lang="zh-CN" altLang="en-US"/>
+              <a:t>生成数据）【检查模型生成是否按照我们预想进行】</a:t>
+            </a:r>
+            <a:r>
+              <a:rPr lang="en-US" altLang="zh-CN"/>
+              <a:t> </a:t>
+            </a:r>
+            <a:r>
+              <a:rPr lang="zh-CN" altLang="en-US"/>
+              <a:t>参考文献</a:t>
+            </a:r>
+            <a:endParaRPr lang="zh-CN" altLang="en-US"/>
+          </a:p>
+          <a:p>
+            <a:pPr algn="ctr"/>
+            <a:endParaRPr lang="zh-CN" altLang="en-US">
+              <a:highlight>
+                <a:srgbClr val="C0C0C0"/>
+              </a:highlight>
+            </a:endParaRPr>
+          </a:p>
+          <a:p>
+            <a:pPr marL="285750" indent="-285750" algn="l">
+              <a:buFont typeface="Wingdings" panose="05000000000000000000" charset="0"/>
+              <a:buChar char="Ø"/>
+            </a:pPr>
+            <a:r>
+              <a:rPr lang="zh-CN" altLang="en-US"/>
+              <a:t>第三类：结构</a:t>
+            </a:r>
+            <a:r>
+              <a:rPr lang="en-US" altLang="zh-CN"/>
+              <a:t> / </a:t>
+            </a:r>
+            <a:r>
+              <a:rPr lang="zh-CN" altLang="en-US"/>
+              <a:t>过程层检验（可解释性与鲁棒性）</a:t>
+            </a:r>
+            <a:endParaRPr lang="zh-CN" altLang="en-US"/>
+          </a:p>
+          <a:p>
+            <a:pPr indent="457200" algn="ctr">
+              <a:buNone/>
+            </a:pPr>
+            <a:r>
+              <a:rPr lang="zh-CN" altLang="en-US">
+                <a:highlight>
+                  <a:srgbClr val="C0C0C0"/>
+                </a:highlight>
+              </a:rPr>
+              <a:t>模型的心理机制是否可识别、稳定，而不是</a:t>
+            </a:r>
+            <a:r>
+              <a:rPr lang="en-US" altLang="zh-CN">
+                <a:highlight>
+                  <a:srgbClr val="C0C0C0"/>
+                </a:highlight>
+              </a:rPr>
+              <a:t>“</a:t>
+            </a:r>
+            <a:r>
+              <a:rPr lang="zh-CN" altLang="en-US">
+                <a:highlight>
+                  <a:srgbClr val="C0C0C0"/>
+                </a:highlight>
+              </a:rPr>
+              <a:t>参数万能解释器</a:t>
+            </a:r>
+            <a:r>
+              <a:rPr lang="en-US" altLang="zh-CN">
+                <a:highlight>
+                  <a:srgbClr val="C0C0C0"/>
+                </a:highlight>
+              </a:rPr>
+              <a:t>”</a:t>
+            </a:r>
+            <a:r>
+              <a:rPr lang="zh-CN" altLang="en-US">
+                <a:highlight>
+                  <a:srgbClr val="C0C0C0"/>
+                </a:highlight>
+              </a:rPr>
+              <a:t>？</a:t>
+            </a:r>
+            <a:r>
+              <a:rPr lang="en-US" altLang="zh-CN">
+                <a:highlight>
+                  <a:srgbClr val="C0C0C0"/>
+                </a:highlight>
+              </a:rPr>
+              <a:t>	</a:t>
+            </a:r>
+            <a:endParaRPr lang="zh-CN" altLang="en-US">
+              <a:highlight>
+                <a:srgbClr val="C0C0C0"/>
+              </a:highlight>
+            </a:endParaRPr>
+          </a:p>
+          <a:p>
+            <a:pPr marL="800100" lvl="1" indent="-342900" algn="l">
+              <a:buAutoNum type="arabicPeriod"/>
+            </a:pPr>
+            <a:r>
+              <a:rPr lang="en-US" altLang="zh-CN"/>
+              <a:t>Palminteri, S., Wyart, V., &amp; Koechlin, E. (2017).The importance of falsification in computational cognitive modeling.Trends in Cognitive Sciences, 21(6), 425–433.https://doi.org/10.1016/j.tics.2017.03.011</a:t>
+            </a:r>
+            <a:endParaRPr lang="en-US" altLang="zh-CN"/>
+          </a:p>
+          <a:p>
+            <a:pPr marL="800100" lvl="1" indent="-342900" algn="l">
+              <a:buAutoNum type="arabicPeriod"/>
+            </a:pPr>
+            <a:r>
+              <a:rPr lang="en-US" altLang="zh-CN"/>
+              <a:t>Heathcote, A., Brown, S. D., &amp; Wagenmakers, E.-J. (2015).An introduction to good practices in cognitive modeling.Psychological Methods, 20(4), 401–421.https://doi.org/10.1037/met0000047</a:t>
+            </a:r>
+            <a:endParaRPr lang="en-US" altLang="zh-CN"/>
+          </a:p>
+          <a:p>
+            <a:pPr marL="800100" lvl="1" indent="-342900" algn="l">
+              <a:buAutoNum type="arabicPeriod"/>
+            </a:pPr>
+            <a:r>
+              <a:rPr lang="en-US" altLang="zh-CN"/>
+              <a:t>Wilson, R. C., &amp; Adams, R. A. (2013).Gaussian process kernels for pattern discovery and extrapolation.arXiv preprint arXiv:1302.4245.</a:t>
+            </a:r>
+            <a:endParaRPr lang="en-US" altLang="zh-CN"/>
+          </a:p>
+          <a:p>
+            <a:pPr marL="800100" lvl="1" indent="-342900" algn="l">
+              <a:buAutoNum type="arabicPeriod"/>
+            </a:pPr>
+            <a:r>
+              <a:rPr lang="en-US" altLang="zh-CN"/>
+              <a:t>H</a:t>
+            </a:r>
+            <a:r>
+              <a:rPr lang="en-US" altLang="en-US"/>
+              <a:t>ü</a:t>
+            </a:r>
+            <a:r>
+              <a:rPr lang="en-US" altLang="zh-CN"/>
+              <a:t>bner, R., &amp; Pelzer, T. (2020). Improving parameter recovery for conflict drift-diffusion models. Behavior Research Methods, 52(5), 1848-1866. https://doi.org/10.3758/s13428-020-01366-8</a:t>
+            </a:r>
+            <a:endParaRPr lang="en-US" altLang="zh-CN"/>
+          </a:p>
+          <a:p>
+            <a:pPr marL="800100" lvl="1" indent="-342900" algn="l">
+              <a:buAutoNum type="arabicPeriod"/>
+            </a:pPr>
+            <a:r>
+              <a:rPr lang="en-US" altLang="zh-CN"/>
+              <a:t>White, C. N., Servant, M., &amp; Logan, G. D. (2018). Testing the validity of conflict drift-diffusion models for use in estimating cognitive processes: A parameter-recovery study. Psychonomic Bulletin &amp; Review, 25(1), 286-301. https://doi.org/10.3758/s13423-017-1271-2</a:t>
+            </a:r>
+            <a:endParaRPr lang="en-US" altLang="zh-CN"/>
+          </a:p>
+          <a:p>
+            <a:pPr marL="800100" lvl="1" indent="-342900" algn="l">
+              <a:buAutoNum type="arabicPeriod"/>
+            </a:pPr>
+            <a:r>
+              <a:rPr lang="en-US" altLang="zh-CN"/>
+              <a:t>H</a:t>
+            </a:r>
+            <a:r>
+              <a:rPr lang="en-US" altLang="en-US"/>
+              <a:t>ü</a:t>
+            </a:r>
+            <a:r>
+              <a:rPr lang="en-US" altLang="zh-CN"/>
+              <a:t>bner, R., &amp; Pelzer, T. (2020). Improving parameter recovery for conflict drift-diffusion models. Behavior Research Methods, 52(5), 1848-1866. https://doi.org/10.3758/s13428-020-01366-8</a:t>
+            </a:r>
+            <a:endParaRPr lang="en-US" altLang="zh-CN"/>
+          </a:p>
+          <a:p>
+            <a:pPr marL="800100" lvl="1" indent="-342900" algn="l">
+              <a:buAutoNum type="arabicPeriod"/>
+            </a:pPr>
+            <a:endParaRPr lang="en-US" altLang="zh-CN"/>
           </a:p>
         </p:txBody>
       </p:sp>

--- a/4_Reports/Study_Method.pptx
+++ b/4_Reports/Study_Method.pptx
@@ -117,7 +117,7 @@
   <p:extLst>
     <p:ext uri="{EFAFB233-063F-42B5-8137-9DF3F51BA10A}">
       <p15:sldGuideLst xmlns:p15="http://schemas.microsoft.com/office/powerpoint/2012/main">
-        <p15:guide id="1" orient="horz" pos="2155" userDrawn="1">
+        <p15:guide id="1" orient="horz" pos="2131" userDrawn="1">
           <p15:clr>
             <a:srgbClr val="A4A3A4"/>
           </p15:clr>
@@ -2949,7 +2949,7 @@
         <p:spPr>
           <a:xfrm>
             <a:off x="525780" y="429260"/>
-            <a:ext cx="11115040" cy="3138170"/>
+            <a:ext cx="11115040" cy="5908040"/>
           </a:xfrm>
           <a:prstGeom prst="rect">
             <a:avLst/>
@@ -3109,7 +3109,11 @@
               <a:t>{</a:t>
             </a:r>
             <a:r>
-              <a:rPr lang="zh-CN" altLang="en-US"/>
+              <a:rPr lang="zh-CN" altLang="en-US">
+                <a:highlight>
+                  <a:srgbClr val="C0C0C0"/>
+                </a:highlight>
+              </a:rPr>
               <a:t>可能是选做</a:t>
             </a:r>
             <a:r>
@@ -3145,57 +3149,18 @@
             </a:r>
             <a:endParaRPr lang="zh-CN" altLang="en-US"/>
           </a:p>
-        </p:txBody>
-      </p:sp>
-      <p:sp>
-        <p:nvSpPr>
-          <p:cNvPr id="2" name="文本框 1"/>
-          <p:cNvSpPr txBox="1"/>
-          <p:nvPr/>
-        </p:nvSpPr>
-        <p:spPr>
-          <a:xfrm>
-            <a:off x="154940" y="4227830"/>
-            <a:ext cx="4064000" cy="368300"/>
-          </a:xfrm>
-          <a:prstGeom prst="rect">
-            <a:avLst/>
-          </a:prstGeom>
-          <a:noFill/>
-        </p:spPr>
-        <p:txBody>
-          <a:bodyPr wrap="square" rtlCol="0">
-            <a:spAutoFit/>
-          </a:bodyPr>
-          <a:p>
-            <a:r>
-              <a:rPr lang="zh-CN" altLang="en-US"/>
+          <a:p>
+            <a:endParaRPr lang="zh-CN" altLang="en-US"/>
+          </a:p>
+          <a:p>
+            <a:r>
+              <a:rPr lang="zh-CN" altLang="en-US">
+                <a:sym typeface="+mn-ea"/>
+              </a:rPr>
               <a:t>模型层面：</a:t>
             </a:r>
             <a:endParaRPr lang="zh-CN" altLang="en-US"/>
           </a:p>
-        </p:txBody>
-      </p:sp>
-      <p:sp>
-        <p:nvSpPr>
-          <p:cNvPr id="3" name="文本框 2"/>
-          <p:cNvSpPr txBox="1"/>
-          <p:nvPr/>
-        </p:nvSpPr>
-        <p:spPr>
-          <a:xfrm>
-            <a:off x="525780" y="4787265"/>
-            <a:ext cx="8637270" cy="2030095"/>
-          </a:xfrm>
-          <a:prstGeom prst="rect">
-            <a:avLst/>
-          </a:prstGeom>
-          <a:noFill/>
-        </p:spPr>
-        <p:txBody>
-          <a:bodyPr wrap="square" rtlCol="0">
-            <a:spAutoFit/>
-          </a:bodyPr>
           <a:p>
             <a:r>
               <a:rPr lang="zh-CN" altLang="en-US">
@@ -3370,6 +3335,9 @@
           <a:p>
             <a:pPr indent="457200"/>
             <a:endParaRPr lang="en-US" altLang="zh-CN"/>
+          </a:p>
+          <a:p>
+            <a:endParaRPr lang="zh-CN" altLang="en-US"/>
           </a:p>
         </p:txBody>
       </p:sp>

--- a/4_Reports/Study_Method.pptx
+++ b/4_Reports/Study_Method.pptx
@@ -16,6 +16,7 @@
     <p:sldId id="262" r:id="rId11"/>
     <p:sldId id="265" r:id="rId12"/>
     <p:sldId id="263" r:id="rId13"/>
+    <p:sldId id="269" r:id="rId14"/>
   </p:sldIdLst>
   <p:sldSz cx="12192000" cy="6858000"/>
   <p:notesSz cx="6858000" cy="9144000"/>
@@ -3731,6 +3732,49 @@
 </p:sld>
 </file>
 
+<file path=ppt/slides/slide12.xml><?xml version="1.0" encoding="utf-8"?>
+<p:sld xmlns:a="http://schemas.openxmlformats.org/drawingml/2006/main" xmlns:r="http://schemas.openxmlformats.org/officeDocument/2006/relationships" xmlns:p="http://schemas.openxmlformats.org/presentationml/2006/main">
+  <p:cSld>
+    <p:spTree>
+      <p:nvGrpSpPr>
+        <p:cNvPr id="1" name=""/>
+        <p:cNvGrpSpPr/>
+        <p:nvPr/>
+      </p:nvGrpSpPr>
+      <p:grpSpPr/>
+      <p:sp>
+        <p:nvSpPr>
+          <p:cNvPr id="4" name="文本框 3"/>
+          <p:cNvSpPr txBox="1"/>
+          <p:nvPr/>
+        </p:nvSpPr>
+        <p:spPr>
+          <a:xfrm>
+            <a:off x="720090" y="586105"/>
+            <a:ext cx="4064000" cy="368300"/>
+          </a:xfrm>
+          <a:prstGeom prst="rect">
+            <a:avLst/>
+          </a:prstGeom>
+          <a:noFill/>
+        </p:spPr>
+        <p:txBody>
+          <a:bodyPr wrap="square" rtlCol="0">
+            <a:spAutoFit/>
+          </a:bodyPr>
+          <a:p>
+            <a:endParaRPr lang="zh-CN" altLang="en-US"/>
+          </a:p>
+        </p:txBody>
+      </p:sp>
+    </p:spTree>
+  </p:cSld>
+  <p:clrMapOvr>
+    <a:masterClrMapping/>
+  </p:clrMapOvr>
+</p:sld>
+</file>
+
 <file path=ppt/slides/slide2.xml><?xml version="1.0" encoding="utf-8"?>
 <p:sld xmlns:a="http://schemas.openxmlformats.org/drawingml/2006/main" xmlns:r="http://schemas.openxmlformats.org/officeDocument/2006/relationships" xmlns:p="http://schemas.openxmlformats.org/presentationml/2006/main">
   <p:cSld>
